--- a/outputs/C.H._marketing_digital.pptx
+++ b/outputs/C.H._marketing_digital.pptx
@@ -3103,61 +3103,6 @@
           <a:prstGeom prst="rect">
             <a:avLst/>
           </a:prstGeom>
-          <a:ln>
-            <a:noFill/>
-          </a:ln>
-          <a:effectLst/>
-          <a:gradFill flip="none" rotWithShape="1">
-            <a:gsLst>
-              <a:gs pos="0">
-                <a:srgbClr val="07227A"/>
-              </a:gs>
-              <a:gs pos="85000">
-                <a:srgbClr val="07227A"/>
-              </a:gs>
-              <a:gs pos="100000">
-                <a:srgbClr val="1FCBD9"/>
-              </a:gs>
-            </a:gsLst>
-            <a:lin ang="2700000" scaled="0"/>
-          </a:gradFill>
-        </p:spPr>
-        <p:style>
-          <a:lnRef idx="1">
-            <a:schemeClr val="accent1"/>
-          </a:lnRef>
-          <a:fillRef idx="3">
-            <a:schemeClr val="accent1"/>
-          </a:fillRef>
-          <a:effectRef idx="2">
-            <a:schemeClr val="accent1"/>
-          </a:effectRef>
-          <a:fontRef idx="minor">
-            <a:schemeClr val="lt1"/>
-          </a:fontRef>
-        </p:style>
-        <p:txBody>
-          <a:bodyPr rtlCol="0" anchor="ctr"/>
-          <a:lstStyle/>
-          <a:p>
-            <a:pPr algn="ctr"/>
-          </a:p>
-        </p:txBody>
-      </p:sp>
-      <p:sp>
-        <p:nvSpPr>
-          <p:cNvPr id="3" name="Rectangle 2"/>
-          <p:cNvSpPr/>
-          <p:nvPr/>
-        </p:nvSpPr>
-        <p:spPr>
-          <a:xfrm>
-            <a:off x="0" y="0"/>
-            <a:ext cx="4300000" cy="6858000"/>
-          </a:xfrm>
-          <a:prstGeom prst="rect">
-            <a:avLst/>
-          </a:prstGeom>
           <a:solidFill>
             <a:srgbClr val="061A5E"/>
           </a:solidFill>
@@ -3190,7 +3135,956 @@
       </p:sp>
       <p:sp>
         <p:nvSpPr>
-          <p:cNvPr id="4" name="Rectangle 3"/>
+          <p:cNvPr id="3" name="Rectangle 2"/>
+          <p:cNvSpPr/>
+          <p:nvPr/>
+        </p:nvSpPr>
+        <p:spPr>
+          <a:xfrm>
+            <a:off x="4300000" y="0"/>
+            <a:ext cx="15000" cy="6858000"/>
+          </a:xfrm>
+          <a:prstGeom prst="rect">
+            <a:avLst/>
+          </a:prstGeom>
+          <a:solidFill>
+            <a:srgbClr val="3AEDE5"/>
+          </a:solidFill>
+          <a:ln>
+            <a:noFill/>
+          </a:ln>
+          <a:effectLst/>
+        </p:spPr>
+        <p:style>
+          <a:lnRef idx="1">
+            <a:schemeClr val="accent1"/>
+          </a:lnRef>
+          <a:fillRef idx="3">
+            <a:schemeClr val="accent1"/>
+          </a:fillRef>
+          <a:effectRef idx="2">
+            <a:schemeClr val="accent1"/>
+          </a:effectRef>
+          <a:fontRef idx="minor">
+            <a:schemeClr val="lt1"/>
+          </a:fontRef>
+        </p:style>
+        <p:txBody>
+          <a:bodyPr rtlCol="0" anchor="ctr"/>
+          <a:lstStyle/>
+          <a:p>
+            <a:pPr algn="ctr"/>
+          </a:p>
+        </p:txBody>
+      </p:sp>
+      <p:pic>
+        <p:nvPicPr>
+          <p:cNvPr id="4" name="Picture 3" descr="inside_circle_logo.png"/>
+          <p:cNvPicPr>
+            <a:picLocks noChangeAspect="1"/>
+          </p:cNvPicPr>
+          <p:nvPr/>
+        </p:nvPicPr>
+        <p:blipFill>
+          <a:blip r:embed="rId2"/>
+          <a:stretch>
+            <a:fillRect/>
+          </a:stretch>
+        </p:blipFill>
+        <p:spPr>
+          <a:xfrm>
+            <a:off x="10660000" y="130000"/>
+            <a:ext cx="1302000" cy="420000"/>
+          </a:xfrm>
+          <a:prstGeom prst="rect">
+            <a:avLst/>
+          </a:prstGeom>
+        </p:spPr>
+      </p:pic>
+      <p:sp>
+        <p:nvSpPr>
+          <p:cNvPr id="5" name="TextBox 4"/>
+          <p:cNvSpPr txBox="1"/>
+          <p:nvPr/>
+        </p:nvSpPr>
+        <p:spPr>
+          <a:xfrm>
+            <a:off x="228600" y="260000"/>
+            <a:ext cx="3842800" cy="800000"/>
+          </a:xfrm>
+          <a:prstGeom prst="rect">
+            <a:avLst/>
+          </a:prstGeom>
+          <a:noFill/>
+        </p:spPr>
+        <p:txBody>
+          <a:bodyPr wrap="square" lIns="0" rIns="0" tIns="0" bIns="0">
+            <a:spAutoFit/>
+          </a:bodyPr>
+          <a:lstStyle/>
+          <a:p>
+            <a:pPr algn="l"/>
+            <a:r>
+              <a:rPr sz="4800" b="1" i="0">
+                <a:solidFill>
+                  <a:srgbClr val="3AEDE5"/>
+                </a:solidFill>
+                <a:latin typeface="Alegreya Sans"/>
+              </a:rPr>
+              <a:t>C.H.</a:t>
+            </a:r>
+          </a:p>
+        </p:txBody>
+      </p:sp>
+      <p:sp>
+        <p:nvSpPr>
+          <p:cNvPr id="6" name="TextBox 5"/>
+          <p:cNvSpPr txBox="1"/>
+          <p:nvPr/>
+        </p:nvSpPr>
+        <p:spPr>
+          <a:xfrm>
+            <a:off x="4528600" y="300000"/>
+            <a:ext cx="5963400" cy="800000"/>
+          </a:xfrm>
+          <a:prstGeom prst="rect">
+            <a:avLst/>
+          </a:prstGeom>
+          <a:noFill/>
+        </p:spPr>
+        <p:txBody>
+          <a:bodyPr wrap="square" lIns="0" rIns="0" tIns="0" bIns="0">
+            <a:spAutoFit/>
+          </a:bodyPr>
+          <a:lstStyle/>
+          <a:p>
+            <a:r>
+              <a:rPr sz="2400" b="1" i="0">
+                <a:solidFill>
+                  <a:srgbClr val="FFFFFF"/>
+                </a:solidFill>
+                <a:latin typeface="Alegreya Sans"/>
+              </a:rPr>
+              <a:t>Chargée de Création de contenu &amp; Marketing Digital</a:t>
+            </a:r>
+          </a:p>
+          <a:p>
+            <a:pPr>
+              <a:spcBef>
+                <a:spcPts val="200"/>
+              </a:spcBef>
+            </a:pPr>
+            <a:r>
+              <a:rPr sz="1500" b="0" i="1">
+                <a:solidFill>
+                  <a:srgbClr val="3AEDE5"/>
+                </a:solidFill>
+                <a:latin typeface="Alegreya Sans"/>
+              </a:rPr>
+              <a:t>Marketing Digital — Création de contenu (alternance)</a:t>
+            </a:r>
+          </a:p>
+        </p:txBody>
+      </p:sp>
+      <p:sp>
+        <p:nvSpPr>
+          <p:cNvPr id="7" name="TextBox 6"/>
+          <p:cNvSpPr txBox="1"/>
+          <p:nvPr/>
+        </p:nvSpPr>
+        <p:spPr>
+          <a:xfrm>
+            <a:off x="228600" y="1180000"/>
+            <a:ext cx="3842800" cy="5318000"/>
+          </a:xfrm>
+          <a:prstGeom prst="rect">
+            <a:avLst/>
+          </a:prstGeom>
+          <a:noFill/>
+        </p:spPr>
+        <p:txBody>
+          <a:bodyPr wrap="square" lIns="0" rIns="0" tIns="0" bIns="0">
+            <a:spAutoFit/>
+          </a:bodyPr>
+          <a:lstStyle/>
+          <a:p>
+            <a:pPr algn="l">
+              <a:spcAft>
+                <a:spcPts val="300"/>
+              </a:spcAft>
+            </a:pPr>
+            <a:r>
+              <a:rPr sz="1300" b="1" i="0">
+                <a:solidFill>
+                  <a:srgbClr val="3AEDE5"/>
+                </a:solidFill>
+                <a:latin typeface="Alegreya Sans"/>
+              </a:rPr>
+              <a:t>DOMAINES D'EXPERTISE</a:t>
+            </a:r>
+          </a:p>
+          <a:p>
+            <a:pPr algn="l">
+              <a:spcAft>
+                <a:spcPts val="100"/>
+              </a:spcAft>
+            </a:pPr>
+            <a:r>
+              <a:rPr sz="1200" b="1" i="0">
+                <a:solidFill>
+                  <a:srgbClr val="3AEDE5"/>
+                </a:solidFill>
+                <a:latin typeface="Alegreya Sans"/>
+              </a:rPr>
+              <a:t>•  </a:t>
+            </a:r>
+            <a:r>
+              <a:rPr sz="1200" b="0" i="0">
+                <a:solidFill>
+                  <a:srgbClr val="FFFFFF"/>
+                </a:solidFill>
+                <a:latin typeface="Alegreya Sans"/>
+              </a:rPr>
+              <a:t>Création de contenu (réseaux &amp; web)</a:t>
+            </a:r>
+          </a:p>
+          <a:p>
+            <a:pPr algn="l">
+              <a:spcAft>
+                <a:spcPts val="100"/>
+              </a:spcAft>
+            </a:pPr>
+            <a:r>
+              <a:rPr sz="1200" b="1" i="0">
+                <a:solidFill>
+                  <a:srgbClr val="3AEDE5"/>
+                </a:solidFill>
+                <a:latin typeface="Alegreya Sans"/>
+              </a:rPr>
+              <a:t>•  </a:t>
+            </a:r>
+            <a:r>
+              <a:rPr sz="1200" b="0" i="0">
+                <a:solidFill>
+                  <a:srgbClr val="FFFFFF"/>
+                </a:solidFill>
+                <a:latin typeface="Alegreya Sans"/>
+              </a:rPr>
+              <a:t>Marketing événementiel</a:t>
+            </a:r>
+          </a:p>
+          <a:p>
+            <a:pPr algn="l">
+              <a:spcAft>
+                <a:spcPts val="100"/>
+              </a:spcAft>
+            </a:pPr>
+            <a:r>
+              <a:rPr sz="1200" b="1" i="0">
+                <a:solidFill>
+                  <a:srgbClr val="3AEDE5"/>
+                </a:solidFill>
+                <a:latin typeface="Alegreya Sans"/>
+              </a:rPr>
+              <a:t>•  </a:t>
+            </a:r>
+            <a:r>
+              <a:rPr sz="1200" b="0" i="0">
+                <a:solidFill>
+                  <a:srgbClr val="FFFFFF"/>
+                </a:solidFill>
+                <a:latin typeface="Alegreya Sans"/>
+              </a:rPr>
+              <a:t>Emailing &amp; campagnes (Mailchimp)</a:t>
+            </a:r>
+          </a:p>
+          <a:p>
+            <a:pPr algn="l">
+              <a:spcAft>
+                <a:spcPts val="100"/>
+              </a:spcAft>
+            </a:pPr>
+            <a:r>
+              <a:rPr sz="1200" b="1" i="0">
+                <a:solidFill>
+                  <a:srgbClr val="3AEDE5"/>
+                </a:solidFill>
+                <a:latin typeface="Alegreya Sans"/>
+              </a:rPr>
+              <a:t>•  </a:t>
+            </a:r>
+            <a:r>
+              <a:rPr sz="1200" b="0" i="0">
+                <a:solidFill>
+                  <a:srgbClr val="FFFFFF"/>
+                </a:solidFill>
+                <a:latin typeface="Alegreya Sans"/>
+              </a:rPr>
+              <a:t>CRM &amp; relation client</a:t>
+            </a:r>
+          </a:p>
+          <a:p>
+            <a:pPr algn="l">
+              <a:spcAft>
+                <a:spcPts val="100"/>
+              </a:spcAft>
+            </a:pPr>
+            <a:r>
+              <a:rPr sz="1200" b="1" i="0">
+                <a:solidFill>
+                  <a:srgbClr val="3AEDE5"/>
+                </a:solidFill>
+                <a:latin typeface="Alegreya Sans"/>
+              </a:rPr>
+              <a:t>•  </a:t>
+            </a:r>
+            <a:r>
+              <a:rPr sz="1200" b="0" i="0">
+                <a:solidFill>
+                  <a:srgbClr val="FFFFFF"/>
+                </a:solidFill>
+                <a:latin typeface="Alegreya Sans"/>
+              </a:rPr>
+              <a:t>Reporting (GA, Meta, Excel)</a:t>
+            </a:r>
+          </a:p>
+          <a:p>
+            <a:pPr algn="l">
+              <a:spcBef>
+                <a:spcPts val="600"/>
+              </a:spcBef>
+              <a:spcAft>
+                <a:spcPts val="300"/>
+              </a:spcAft>
+            </a:pPr>
+            <a:r>
+              <a:rPr sz="1300" b="1" i="0">
+                <a:solidFill>
+                  <a:srgbClr val="3AEDE5"/>
+                </a:solidFill>
+                <a:latin typeface="Alegreya Sans"/>
+              </a:rPr>
+              <a:t>LANGUES</a:t>
+            </a:r>
+          </a:p>
+          <a:p>
+            <a:pPr algn="l">
+              <a:spcAft>
+                <a:spcPts val="100"/>
+              </a:spcAft>
+            </a:pPr>
+            <a:r>
+              <a:rPr sz="1200" b="1" i="0">
+                <a:solidFill>
+                  <a:srgbClr val="3AEDE5"/>
+                </a:solidFill>
+                <a:latin typeface="Alegreya Sans"/>
+              </a:rPr>
+              <a:t>•  </a:t>
+            </a:r>
+            <a:r>
+              <a:rPr sz="1200" b="0" i="0">
+                <a:solidFill>
+                  <a:srgbClr val="FFFFFF"/>
+                </a:solidFill>
+                <a:latin typeface="Alegreya Sans"/>
+              </a:rPr>
+              <a:t>Français — Courant</a:t>
+            </a:r>
+          </a:p>
+          <a:p>
+            <a:pPr algn="l">
+              <a:spcAft>
+                <a:spcPts val="100"/>
+              </a:spcAft>
+            </a:pPr>
+            <a:r>
+              <a:rPr sz="1200" b="1" i="0">
+                <a:solidFill>
+                  <a:srgbClr val="3AEDE5"/>
+                </a:solidFill>
+                <a:latin typeface="Alegreya Sans"/>
+              </a:rPr>
+              <a:t>•  </a:t>
+            </a:r>
+            <a:r>
+              <a:rPr sz="1200" b="0" i="0">
+                <a:solidFill>
+                  <a:srgbClr val="FFFFFF"/>
+                </a:solidFill>
+                <a:latin typeface="Alegreya Sans"/>
+              </a:rPr>
+              <a:t>Anglais — Courant</a:t>
+            </a:r>
+          </a:p>
+          <a:p>
+            <a:pPr algn="l">
+              <a:spcAft>
+                <a:spcPts val="100"/>
+              </a:spcAft>
+            </a:pPr>
+            <a:r>
+              <a:rPr sz="1200" b="1" i="0">
+                <a:solidFill>
+                  <a:srgbClr val="3AEDE5"/>
+                </a:solidFill>
+                <a:latin typeface="Alegreya Sans"/>
+              </a:rPr>
+              <a:t>•  </a:t>
+            </a:r>
+            <a:r>
+              <a:rPr sz="1200" b="0" i="0">
+                <a:solidFill>
+                  <a:srgbClr val="FFFFFF"/>
+                </a:solidFill>
+                <a:latin typeface="Alegreya Sans"/>
+              </a:rPr>
+              <a:t>Arabe — Courant</a:t>
+            </a:r>
+          </a:p>
+          <a:p>
+            <a:pPr algn="l">
+              <a:spcBef>
+                <a:spcPts val="600"/>
+              </a:spcBef>
+              <a:spcAft>
+                <a:spcPts val="300"/>
+              </a:spcAft>
+            </a:pPr>
+            <a:r>
+              <a:rPr sz="1300" b="1" i="0">
+                <a:solidFill>
+                  <a:srgbClr val="3AEDE5"/>
+                </a:solidFill>
+                <a:latin typeface="Alegreya Sans"/>
+              </a:rPr>
+              <a:t>FORMATION &amp; CERTIFICATIONS</a:t>
+            </a:r>
+          </a:p>
+          <a:p>
+            <a:pPr algn="l">
+              <a:spcAft>
+                <a:spcPts val="100"/>
+              </a:spcAft>
+            </a:pPr>
+            <a:r>
+              <a:rPr sz="1200" b="1" i="0">
+                <a:solidFill>
+                  <a:srgbClr val="3AEDE5"/>
+                </a:solidFill>
+                <a:latin typeface="Alegreya Sans"/>
+              </a:rPr>
+              <a:t>2024 — Présent  </a:t>
+            </a:r>
+            <a:r>
+              <a:rPr sz="1200" b="1" i="0">
+                <a:solidFill>
+                  <a:srgbClr val="FFFFFF"/>
+                </a:solidFill>
+                <a:latin typeface="Alegreya Sans"/>
+              </a:rPr>
+              <a:t>École de commerce INSEEC</a:t>
+            </a:r>
+          </a:p>
+          <a:p>
+            <a:pPr algn="l">
+              <a:spcAft>
+                <a:spcPts val="300"/>
+              </a:spcAft>
+            </a:pPr>
+            <a:r>
+              <a:rPr sz="1200" b="0" i="1">
+                <a:solidFill>
+                  <a:srgbClr val="CCD6E8"/>
+                </a:solidFill>
+                <a:latin typeface="Alegreya Sans"/>
+              </a:rPr>
+              <a:t>Bachelor Resp. de Projet Marketing &amp; Com</a:t>
+            </a:r>
+          </a:p>
+          <a:p>
+            <a:pPr algn="l">
+              <a:spcAft>
+                <a:spcPts val="100"/>
+              </a:spcAft>
+            </a:pPr>
+            <a:r>
+              <a:rPr sz="1200" b="1" i="0">
+                <a:solidFill>
+                  <a:srgbClr val="3AEDE5"/>
+                </a:solidFill>
+                <a:latin typeface="Alegreya Sans"/>
+              </a:rPr>
+              <a:t>Bac+3  </a:t>
+            </a:r>
+            <a:r>
+              <a:rPr sz="1200" b="1" i="0">
+                <a:solidFill>
+                  <a:srgbClr val="FFFFFF"/>
+                </a:solidFill>
+                <a:latin typeface="Alegreya Sans"/>
+              </a:rPr>
+              <a:t>Université des Sciences &amp; Technologies</a:t>
+            </a:r>
+          </a:p>
+          <a:p>
+            <a:pPr algn="l">
+              <a:spcAft>
+                <a:spcPts val="300"/>
+              </a:spcAft>
+            </a:pPr>
+            <a:r>
+              <a:rPr sz="1200" b="0" i="1">
+                <a:solidFill>
+                  <a:srgbClr val="CCD6E8"/>
+                </a:solidFill>
+                <a:latin typeface="Alegreya Sans"/>
+              </a:rPr>
+              <a:t>Recherche Opérationnelle</a:t>
+            </a:r>
+          </a:p>
+          <a:p>
+            <a:pPr algn="l">
+              <a:spcBef>
+                <a:spcPts val="600"/>
+              </a:spcBef>
+              <a:spcAft>
+                <a:spcPts val="300"/>
+              </a:spcAft>
+            </a:pPr>
+            <a:r>
+              <a:rPr sz="1300" b="1" i="0">
+                <a:solidFill>
+                  <a:srgbClr val="3AEDE5"/>
+                </a:solidFill>
+                <a:latin typeface="Alegreya Sans"/>
+              </a:rPr>
+              <a:t>CENTRES D'INTÉRÊT</a:t>
+            </a:r>
+          </a:p>
+          <a:p>
+            <a:pPr algn="l">
+              <a:spcAft>
+                <a:spcPts val="100"/>
+              </a:spcAft>
+            </a:pPr>
+            <a:r>
+              <a:rPr sz="1200" b="1" i="0">
+                <a:solidFill>
+                  <a:srgbClr val="3AEDE5"/>
+                </a:solidFill>
+                <a:latin typeface="Alegreya Sans"/>
+              </a:rPr>
+              <a:t>•  </a:t>
+            </a:r>
+            <a:r>
+              <a:rPr sz="1200" b="0" i="0">
+                <a:solidFill>
+                  <a:srgbClr val="FFFFFF"/>
+                </a:solidFill>
+                <a:latin typeface="Alegreya Sans"/>
+              </a:rPr>
+              <a:t>Cinéma (Wong Kar-Wai)</a:t>
+            </a:r>
+          </a:p>
+          <a:p>
+            <a:pPr algn="l">
+              <a:spcAft>
+                <a:spcPts val="100"/>
+              </a:spcAft>
+            </a:pPr>
+            <a:r>
+              <a:rPr sz="1200" b="1" i="0">
+                <a:solidFill>
+                  <a:srgbClr val="3AEDE5"/>
+                </a:solidFill>
+                <a:latin typeface="Alegreya Sans"/>
+              </a:rPr>
+              <a:t>•  </a:t>
+            </a:r>
+            <a:r>
+              <a:rPr sz="1200" b="0" i="0">
+                <a:solidFill>
+                  <a:srgbClr val="FFFFFF"/>
+                </a:solidFill>
+                <a:latin typeface="Alegreya Sans"/>
+              </a:rPr>
+              <a:t>Peinture &amp; croquis</a:t>
+            </a:r>
+          </a:p>
+          <a:p>
+            <a:pPr algn="l">
+              <a:spcAft>
+                <a:spcPts val="100"/>
+              </a:spcAft>
+            </a:pPr>
+            <a:r>
+              <a:rPr sz="1200" b="1" i="0">
+                <a:solidFill>
+                  <a:srgbClr val="3AEDE5"/>
+                </a:solidFill>
+                <a:latin typeface="Alegreya Sans"/>
+              </a:rPr>
+              <a:t>•  </a:t>
+            </a:r>
+            <a:r>
+              <a:rPr sz="1200" b="0" i="0">
+                <a:solidFill>
+                  <a:srgbClr val="FFFFFF"/>
+                </a:solidFill>
+                <a:latin typeface="Alegreya Sans"/>
+              </a:rPr>
+              <a:t>Mode</a:t>
+            </a:r>
+          </a:p>
+          <a:p>
+            <a:pPr algn="l">
+              <a:spcAft>
+                <a:spcPts val="100"/>
+              </a:spcAft>
+            </a:pPr>
+            <a:r>
+              <a:rPr sz="1200" b="1" i="0">
+                <a:solidFill>
+                  <a:srgbClr val="3AEDE5"/>
+                </a:solidFill>
+                <a:latin typeface="Alegreya Sans"/>
+              </a:rPr>
+              <a:t>•  </a:t>
+            </a:r>
+            <a:r>
+              <a:rPr sz="1200" b="0" i="0">
+                <a:solidFill>
+                  <a:srgbClr val="FFFFFF"/>
+                </a:solidFill>
+                <a:latin typeface="Alegreya Sans"/>
+              </a:rPr>
+              <a:t>Natation (compétition régionale)</a:t>
+            </a:r>
+          </a:p>
+        </p:txBody>
+      </p:sp>
+      <p:sp>
+        <p:nvSpPr>
+          <p:cNvPr id="8" name="TextBox 7"/>
+          <p:cNvSpPr txBox="1"/>
+          <p:nvPr/>
+        </p:nvSpPr>
+        <p:spPr>
+          <a:xfrm>
+            <a:off x="4528600" y="1180000"/>
+            <a:ext cx="7434800" cy="5318000"/>
+          </a:xfrm>
+          <a:prstGeom prst="rect">
+            <a:avLst/>
+          </a:prstGeom>
+          <a:noFill/>
+        </p:spPr>
+        <p:txBody>
+          <a:bodyPr wrap="square" lIns="0" rIns="0" tIns="0" bIns="0">
+            <a:spAutoFit/>
+          </a:bodyPr>
+          <a:lstStyle/>
+          <a:p>
+            <a:pPr algn="l">
+              <a:spcAft>
+                <a:spcPts val="300"/>
+              </a:spcAft>
+            </a:pPr>
+            <a:r>
+              <a:rPr sz="1300" b="1" i="0">
+                <a:solidFill>
+                  <a:srgbClr val="3AEDE5"/>
+                </a:solidFill>
+                <a:latin typeface="Alegreya Sans"/>
+              </a:rPr>
+              <a:t>EXPÉRIENCE PROFESSIONNELLE</a:t>
+            </a:r>
+          </a:p>
+          <a:p>
+            <a:pPr algn="l">
+              <a:spcAft>
+                <a:spcPts val="100"/>
+              </a:spcAft>
+            </a:pPr>
+            <a:r>
+              <a:rPr sz="1200" b="1" i="0">
+                <a:solidFill>
+                  <a:srgbClr val="3AEDE5"/>
+                </a:solidFill>
+                <a:latin typeface="Alegreya Sans"/>
+              </a:rPr>
+              <a:t>▸ </a:t>
+            </a:r>
+            <a:r>
+              <a:rPr sz="1200" b="1" i="0">
+                <a:solidFill>
+                  <a:srgbClr val="FFFFFF"/>
+                </a:solidFill>
+                <a:latin typeface="Alegreya Sans"/>
+              </a:rPr>
+              <a:t>Galerie Joseph (réseau de 30 espaces, Le Marais)</a:t>
+            </a:r>
+            <a:r>
+              <a:rPr sz="1200" b="0" i="0">
+                <a:solidFill>
+                  <a:srgbClr val="FFFFFF"/>
+                </a:solidFill>
+                <a:latin typeface="Alegreya Sans"/>
+              </a:rPr>
+              <a:t> — Assistante chef de projet Communication / Event</a:t>
+            </a:r>
+            <a:r>
+              <a:rPr sz="1200" b="0" i="1">
+                <a:solidFill>
+                  <a:srgbClr val="3AEDE5"/>
+                </a:solidFill>
+                <a:latin typeface="Alegreya Sans"/>
+              </a:rPr>
+              <a:t>  (Juin — Déc. 2025)</a:t>
+            </a:r>
+          </a:p>
+          <a:p>
+            <a:pPr algn="l" lvl="1">
+              <a:spcAft>
+                <a:spcPts val="100"/>
+              </a:spcAft>
+            </a:pPr>
+            <a:r>
+              <a:rPr sz="1200" b="1" i="0">
+                <a:solidFill>
+                  <a:srgbClr val="3AEDE5"/>
+                </a:solidFill>
+                <a:latin typeface="Alegreya Sans"/>
+              </a:rPr>
+              <a:t>•  </a:t>
+            </a:r>
+            <a:r>
+              <a:rPr sz="1200" b="0" i="0">
+                <a:solidFill>
+                  <a:srgbClr val="FFFFFF"/>
+                </a:solidFill>
+                <a:latin typeface="Alegreya Sans"/>
+              </a:rPr>
+              <a:t>Création de contenus visuels et publications réseaux sociaux, site web, newsletters (Photoshop, Canva, Premiere Pro, Indesign).</a:t>
+            </a:r>
+          </a:p>
+          <a:p>
+            <a:pPr algn="l" lvl="1">
+              <a:spcAft>
+                <a:spcPts val="100"/>
+              </a:spcAft>
+            </a:pPr>
+            <a:r>
+              <a:rPr sz="1200" b="1" i="0">
+                <a:solidFill>
+                  <a:srgbClr val="3AEDE5"/>
+                </a:solidFill>
+                <a:latin typeface="Alegreya Sans"/>
+              </a:rPr>
+              <a:t>•  </a:t>
+            </a:r>
+            <a:r>
+              <a:rPr sz="1200" b="0" i="0">
+                <a:solidFill>
+                  <a:srgbClr val="FFFFFF"/>
+                </a:solidFill>
+                <a:latin typeface="Alegreya Sans"/>
+              </a:rPr>
+              <a:t>Pilotage d'une campagne emailing Mailchimp : +100 % de fréquentation visiteurs et +60 % d'inscriptions vs édition précédente (1 300 vs 800).</a:t>
+            </a:r>
+          </a:p>
+          <a:p>
+            <a:pPr algn="l">
+              <a:spcAft>
+                <a:spcPts val="100"/>
+              </a:spcAft>
+            </a:pPr>
+            <a:r>
+              <a:rPr sz="1200" b="1" i="0">
+                <a:solidFill>
+                  <a:srgbClr val="3AEDE5"/>
+                </a:solidFill>
+                <a:latin typeface="Alegreya Sans"/>
+              </a:rPr>
+              <a:t>▸ </a:t>
+            </a:r>
+            <a:r>
+              <a:rPr sz="1200" b="1" i="0">
+                <a:solidFill>
+                  <a:srgbClr val="FFFFFF"/>
+                </a:solidFill>
+                <a:latin typeface="Alegreya Sans"/>
+              </a:rPr>
+              <a:t>IPM (Groupe presse belge)</a:t>
+            </a:r>
+            <a:r>
+              <a:rPr sz="1200" b="0" i="0">
+                <a:solidFill>
+                  <a:srgbClr val="FFFFFF"/>
+                </a:solidFill>
+                <a:latin typeface="Alegreya Sans"/>
+              </a:rPr>
+              <a:t> — Responsable des relations clients</a:t>
+            </a:r>
+            <a:r>
+              <a:rPr sz="1200" b="0" i="1">
+                <a:solidFill>
+                  <a:srgbClr val="3AEDE5"/>
+                </a:solidFill>
+                <a:latin typeface="Alegreya Sans"/>
+              </a:rPr>
+              <a:t>  (Sept. 2023 — Août 2024)</a:t>
+            </a:r>
+          </a:p>
+          <a:p>
+            <a:pPr algn="l" lvl="1">
+              <a:spcAft>
+                <a:spcPts val="100"/>
+              </a:spcAft>
+            </a:pPr>
+            <a:r>
+              <a:rPr sz="1200" b="1" i="0">
+                <a:solidFill>
+                  <a:srgbClr val="3AEDE5"/>
+                </a:solidFill>
+                <a:latin typeface="Alegreya Sans"/>
+              </a:rPr>
+              <a:t>•  </a:t>
+            </a:r>
+            <a:r>
+              <a:rPr sz="1200" b="0" i="0">
+                <a:solidFill>
+                  <a:srgbClr val="FFFFFF"/>
+                </a:solidFill>
+                <a:latin typeface="Alegreya Sans"/>
+              </a:rPr>
+              <a:t>Contribution à l'optimisation des outils et processus CRM (reporting, tableaux de bord).</a:t>
+            </a:r>
+          </a:p>
+          <a:p>
+            <a:pPr algn="l" lvl="1">
+              <a:spcAft>
+                <a:spcPts val="100"/>
+              </a:spcAft>
+            </a:pPr>
+            <a:r>
+              <a:rPr sz="1200" b="1" i="0">
+                <a:solidFill>
+                  <a:srgbClr val="3AEDE5"/>
+                </a:solidFill>
+                <a:latin typeface="Alegreya Sans"/>
+              </a:rPr>
+              <a:t>•  </a:t>
+            </a:r>
+            <a:r>
+              <a:rPr sz="1200" b="0" i="0">
+                <a:solidFill>
+                  <a:srgbClr val="FFFFFF"/>
+                </a:solidFill>
+                <a:latin typeface="Alegreya Sans"/>
+              </a:rPr>
+              <a:t>Prise en charge et suivi des demandes clients en Front Office et Back Office (analyse, mise à jour, résolution).</a:t>
+            </a:r>
+          </a:p>
+          <a:p>
+            <a:pPr algn="l">
+              <a:spcAft>
+                <a:spcPts val="100"/>
+              </a:spcAft>
+            </a:pPr>
+            <a:r>
+              <a:rPr sz="1200" b="1" i="0">
+                <a:solidFill>
+                  <a:srgbClr val="3AEDE5"/>
+                </a:solidFill>
+                <a:latin typeface="Alegreya Sans"/>
+              </a:rPr>
+              <a:t>▸ </a:t>
+            </a:r>
+            <a:r>
+              <a:rPr sz="1200" b="1" i="0">
+                <a:solidFill>
+                  <a:srgbClr val="FFFFFF"/>
+                </a:solidFill>
+                <a:latin typeface="Alegreya Sans"/>
+              </a:rPr>
+              <a:t>KOMNOW (agence de marketing digital)</a:t>
+            </a:r>
+            <a:r>
+              <a:rPr sz="1200" b="0" i="0">
+                <a:solidFill>
+                  <a:srgbClr val="FFFFFF"/>
+                </a:solidFill>
+                <a:latin typeface="Alegreya Sans"/>
+              </a:rPr>
+              <a:t> — Commercial / Assistante Marketing</a:t>
+            </a:r>
+            <a:r>
+              <a:rPr sz="1200" b="0" i="1">
+                <a:solidFill>
+                  <a:srgbClr val="3AEDE5"/>
+                </a:solidFill>
+                <a:latin typeface="Alegreya Sans"/>
+              </a:rPr>
+              <a:t>  (Janv. 2020 — Août 2023)</a:t>
+            </a:r>
+          </a:p>
+          <a:p>
+            <a:pPr algn="l" lvl="1">
+              <a:spcAft>
+                <a:spcPts val="100"/>
+              </a:spcAft>
+            </a:pPr>
+            <a:r>
+              <a:rPr sz="1200" b="1" i="0">
+                <a:solidFill>
+                  <a:srgbClr val="3AEDE5"/>
+                </a:solidFill>
+                <a:latin typeface="Alegreya Sans"/>
+              </a:rPr>
+              <a:t>•  </a:t>
+            </a:r>
+            <a:r>
+              <a:rPr sz="1200" b="0" i="0">
+                <a:solidFill>
+                  <a:srgbClr val="FFFFFF"/>
+                </a:solidFill>
+                <a:latin typeface="Alegreya Sans"/>
+              </a:rPr>
+              <a:t>Prospection et analyse de marché ; élaboration des propositions commerciales ; suivi et fidélisation clients.</a:t>
+            </a:r>
+          </a:p>
+          <a:p>
+            <a:pPr algn="l" lvl="1">
+              <a:spcAft>
+                <a:spcPts val="100"/>
+              </a:spcAft>
+            </a:pPr>
+            <a:r>
+              <a:rPr sz="1200" b="1" i="0">
+                <a:solidFill>
+                  <a:srgbClr val="3AEDE5"/>
+                </a:solidFill>
+                <a:latin typeface="Alegreya Sans"/>
+              </a:rPr>
+              <a:t>•  </a:t>
+            </a:r>
+            <a:r>
+              <a:rPr sz="1200" b="0" i="0">
+                <a:solidFill>
+                  <a:srgbClr val="FFFFFF"/>
+                </a:solidFill>
+                <a:latin typeface="Alegreya Sans"/>
+              </a:rPr>
+              <a:t>Création de supports de communication (flyers, visuels, newsletters, contenus digitaux) ; gestion des réseaux sociaux.</a:t>
+            </a:r>
+          </a:p>
+        </p:txBody>
+      </p:sp>
+      <p:sp>
+        <p:nvSpPr>
+          <p:cNvPr id="9" name="Rectangle 8"/>
           <p:cNvSpPr/>
           <p:nvPr/>
         </p:nvSpPr>
@@ -3232,911 +4126,6 @@
           </a:p>
         </p:txBody>
       </p:sp>
-      <p:pic>
-        <p:nvPicPr>
-          <p:cNvPr id="5" name="Picture 4" descr="inside_circle_logo.png"/>
-          <p:cNvPicPr>
-            <a:picLocks noChangeAspect="1"/>
-          </p:cNvPicPr>
-          <p:nvPr/>
-        </p:nvPicPr>
-        <p:blipFill>
-          <a:blip r:embed="rId2"/>
-          <a:stretch>
-            <a:fillRect/>
-          </a:stretch>
-        </p:blipFill>
-        <p:spPr>
-          <a:xfrm>
-            <a:off x="10660000" y="130000"/>
-            <a:ext cx="1302000" cy="420000"/>
-          </a:xfrm>
-          <a:prstGeom prst="rect">
-            <a:avLst/>
-          </a:prstGeom>
-        </p:spPr>
-      </p:pic>
-      <p:sp>
-        <p:nvSpPr>
-          <p:cNvPr id="6" name="TextBox 5"/>
-          <p:cNvSpPr txBox="1"/>
-          <p:nvPr/>
-        </p:nvSpPr>
-        <p:spPr>
-          <a:xfrm>
-            <a:off x="228600" y="260000"/>
-            <a:ext cx="3842800" cy="800000"/>
-          </a:xfrm>
-          <a:prstGeom prst="rect">
-            <a:avLst/>
-          </a:prstGeom>
-          <a:noFill/>
-        </p:spPr>
-        <p:txBody>
-          <a:bodyPr wrap="square" lIns="0" rIns="0" tIns="0" bIns="0">
-            <a:spAutoFit/>
-          </a:bodyPr>
-          <a:lstStyle/>
-          <a:p>
-            <a:pPr algn="l"/>
-            <a:r>
-              <a:rPr sz="4800" b="1" i="0">
-                <a:solidFill>
-                  <a:srgbClr val="3AEDE5"/>
-                </a:solidFill>
-                <a:latin typeface="Alegreya Sans"/>
-              </a:rPr>
-              <a:t>C.H.</a:t>
-            </a:r>
-          </a:p>
-        </p:txBody>
-      </p:sp>
-      <p:sp>
-        <p:nvSpPr>
-          <p:cNvPr id="7" name="TextBox 6"/>
-          <p:cNvSpPr txBox="1"/>
-          <p:nvPr/>
-        </p:nvSpPr>
-        <p:spPr>
-          <a:xfrm>
-            <a:off x="4528600" y="300000"/>
-            <a:ext cx="5963400" cy="800000"/>
-          </a:xfrm>
-          <a:prstGeom prst="rect">
-            <a:avLst/>
-          </a:prstGeom>
-          <a:noFill/>
-        </p:spPr>
-        <p:txBody>
-          <a:bodyPr wrap="square" lIns="0" rIns="0" tIns="0" bIns="0">
-            <a:spAutoFit/>
-          </a:bodyPr>
-          <a:lstStyle/>
-          <a:p>
-            <a:r>
-              <a:rPr sz="2400" b="1" i="0">
-                <a:solidFill>
-                  <a:srgbClr val="FFFFFF"/>
-                </a:solidFill>
-                <a:latin typeface="Alegreya Sans"/>
-              </a:rPr>
-              <a:t>Chargée de Création de contenu &amp; Marketing Digital</a:t>
-            </a:r>
-          </a:p>
-          <a:p>
-            <a:pPr>
-              <a:spcBef>
-                <a:spcPts val="200"/>
-              </a:spcBef>
-            </a:pPr>
-            <a:r>
-              <a:rPr sz="1500" b="0" i="1">
-                <a:solidFill>
-                  <a:srgbClr val="3AEDE5"/>
-                </a:solidFill>
-                <a:latin typeface="Alegreya Sans"/>
-              </a:rPr>
-              <a:t>Marketing Digital — Création de contenu (alternance)</a:t>
-            </a:r>
-          </a:p>
-        </p:txBody>
-      </p:sp>
-      <p:sp>
-        <p:nvSpPr>
-          <p:cNvPr id="8" name="TextBox 7"/>
-          <p:cNvSpPr txBox="1"/>
-          <p:nvPr/>
-        </p:nvSpPr>
-        <p:spPr>
-          <a:xfrm>
-            <a:off x="228600" y="1180000"/>
-            <a:ext cx="3842800" cy="5318000"/>
-          </a:xfrm>
-          <a:prstGeom prst="rect">
-            <a:avLst/>
-          </a:prstGeom>
-          <a:noFill/>
-        </p:spPr>
-        <p:txBody>
-          <a:bodyPr wrap="square" lIns="0" rIns="0" tIns="0" bIns="0">
-            <a:spAutoFit/>
-          </a:bodyPr>
-          <a:lstStyle/>
-          <a:p>
-            <a:pPr algn="l">
-              <a:spcAft>
-                <a:spcPts val="300"/>
-              </a:spcAft>
-            </a:pPr>
-            <a:r>
-              <a:rPr sz="1300" b="1" i="0">
-                <a:solidFill>
-                  <a:srgbClr val="3AEDE5"/>
-                </a:solidFill>
-                <a:latin typeface="Alegreya Sans"/>
-              </a:rPr>
-              <a:t>DOMAINES D'EXPERTISE</a:t>
-            </a:r>
-          </a:p>
-          <a:p>
-            <a:pPr algn="l">
-              <a:spcAft>
-                <a:spcPts val="100"/>
-              </a:spcAft>
-            </a:pPr>
-            <a:r>
-              <a:rPr sz="1200" b="1" i="0">
-                <a:solidFill>
-                  <a:srgbClr val="3AEDE5"/>
-                </a:solidFill>
-                <a:latin typeface="Alegreya Sans"/>
-              </a:rPr>
-              <a:t>•  </a:t>
-            </a:r>
-            <a:r>
-              <a:rPr sz="1200" b="0" i="0">
-                <a:solidFill>
-                  <a:srgbClr val="FFFFFF"/>
-                </a:solidFill>
-                <a:latin typeface="Alegreya Sans"/>
-              </a:rPr>
-              <a:t>Création de contenu (réseaux &amp; web)</a:t>
-            </a:r>
-          </a:p>
-          <a:p>
-            <a:pPr algn="l">
-              <a:spcAft>
-                <a:spcPts val="100"/>
-              </a:spcAft>
-            </a:pPr>
-            <a:r>
-              <a:rPr sz="1200" b="1" i="0">
-                <a:solidFill>
-                  <a:srgbClr val="3AEDE5"/>
-                </a:solidFill>
-                <a:latin typeface="Alegreya Sans"/>
-              </a:rPr>
-              <a:t>•  </a:t>
-            </a:r>
-            <a:r>
-              <a:rPr sz="1200" b="0" i="0">
-                <a:solidFill>
-                  <a:srgbClr val="FFFFFF"/>
-                </a:solidFill>
-                <a:latin typeface="Alegreya Sans"/>
-              </a:rPr>
-              <a:t>Marketing événementiel</a:t>
-            </a:r>
-          </a:p>
-          <a:p>
-            <a:pPr algn="l">
-              <a:spcAft>
-                <a:spcPts val="100"/>
-              </a:spcAft>
-            </a:pPr>
-            <a:r>
-              <a:rPr sz="1200" b="1" i="0">
-                <a:solidFill>
-                  <a:srgbClr val="3AEDE5"/>
-                </a:solidFill>
-                <a:latin typeface="Alegreya Sans"/>
-              </a:rPr>
-              <a:t>•  </a:t>
-            </a:r>
-            <a:r>
-              <a:rPr sz="1200" b="0" i="0">
-                <a:solidFill>
-                  <a:srgbClr val="FFFFFF"/>
-                </a:solidFill>
-                <a:latin typeface="Alegreya Sans"/>
-              </a:rPr>
-              <a:t>Emailing &amp; campagnes (Mailchimp)</a:t>
-            </a:r>
-          </a:p>
-          <a:p>
-            <a:pPr algn="l">
-              <a:spcAft>
-                <a:spcPts val="100"/>
-              </a:spcAft>
-            </a:pPr>
-            <a:r>
-              <a:rPr sz="1200" b="1" i="0">
-                <a:solidFill>
-                  <a:srgbClr val="3AEDE5"/>
-                </a:solidFill>
-                <a:latin typeface="Alegreya Sans"/>
-              </a:rPr>
-              <a:t>•  </a:t>
-            </a:r>
-            <a:r>
-              <a:rPr sz="1200" b="0" i="0">
-                <a:solidFill>
-                  <a:srgbClr val="FFFFFF"/>
-                </a:solidFill>
-                <a:latin typeface="Alegreya Sans"/>
-              </a:rPr>
-              <a:t>CRM &amp; relation client</a:t>
-            </a:r>
-          </a:p>
-          <a:p>
-            <a:pPr algn="l">
-              <a:spcAft>
-                <a:spcPts val="100"/>
-              </a:spcAft>
-            </a:pPr>
-            <a:r>
-              <a:rPr sz="1200" b="1" i="0">
-                <a:solidFill>
-                  <a:srgbClr val="3AEDE5"/>
-                </a:solidFill>
-                <a:latin typeface="Alegreya Sans"/>
-              </a:rPr>
-              <a:t>•  </a:t>
-            </a:r>
-            <a:r>
-              <a:rPr sz="1200" b="0" i="0">
-                <a:solidFill>
-                  <a:srgbClr val="FFFFFF"/>
-                </a:solidFill>
-                <a:latin typeface="Alegreya Sans"/>
-              </a:rPr>
-              <a:t>Reporting (GA, Meta, Excel)</a:t>
-            </a:r>
-          </a:p>
-          <a:p>
-            <a:pPr algn="l">
-              <a:spcBef>
-                <a:spcPts val="600"/>
-              </a:spcBef>
-              <a:spcAft>
-                <a:spcPts val="300"/>
-              </a:spcAft>
-            </a:pPr>
-            <a:r>
-              <a:rPr sz="1300" b="1" i="0">
-                <a:solidFill>
-                  <a:srgbClr val="3AEDE5"/>
-                </a:solidFill>
-                <a:latin typeface="Alegreya Sans"/>
-              </a:rPr>
-              <a:t>LANGUES</a:t>
-            </a:r>
-          </a:p>
-          <a:p>
-            <a:pPr algn="l">
-              <a:spcAft>
-                <a:spcPts val="100"/>
-              </a:spcAft>
-            </a:pPr>
-            <a:r>
-              <a:rPr sz="1200" b="1" i="0">
-                <a:solidFill>
-                  <a:srgbClr val="3AEDE5"/>
-                </a:solidFill>
-                <a:latin typeface="Alegreya Sans"/>
-              </a:rPr>
-              <a:t>•  </a:t>
-            </a:r>
-            <a:r>
-              <a:rPr sz="1200" b="0" i="0">
-                <a:solidFill>
-                  <a:srgbClr val="FFFFFF"/>
-                </a:solidFill>
-                <a:latin typeface="Alegreya Sans"/>
-              </a:rPr>
-              <a:t>Français — Courant</a:t>
-            </a:r>
-          </a:p>
-          <a:p>
-            <a:pPr algn="l">
-              <a:spcAft>
-                <a:spcPts val="100"/>
-              </a:spcAft>
-            </a:pPr>
-            <a:r>
-              <a:rPr sz="1200" b="1" i="0">
-                <a:solidFill>
-                  <a:srgbClr val="3AEDE5"/>
-                </a:solidFill>
-                <a:latin typeface="Alegreya Sans"/>
-              </a:rPr>
-              <a:t>•  </a:t>
-            </a:r>
-            <a:r>
-              <a:rPr sz="1200" b="0" i="0">
-                <a:solidFill>
-                  <a:srgbClr val="FFFFFF"/>
-                </a:solidFill>
-                <a:latin typeface="Alegreya Sans"/>
-              </a:rPr>
-              <a:t>Anglais — Courant</a:t>
-            </a:r>
-          </a:p>
-          <a:p>
-            <a:pPr algn="l">
-              <a:spcAft>
-                <a:spcPts val="100"/>
-              </a:spcAft>
-            </a:pPr>
-            <a:r>
-              <a:rPr sz="1200" b="1" i="0">
-                <a:solidFill>
-                  <a:srgbClr val="3AEDE5"/>
-                </a:solidFill>
-                <a:latin typeface="Alegreya Sans"/>
-              </a:rPr>
-              <a:t>•  </a:t>
-            </a:r>
-            <a:r>
-              <a:rPr sz="1200" b="0" i="0">
-                <a:solidFill>
-                  <a:srgbClr val="FFFFFF"/>
-                </a:solidFill>
-                <a:latin typeface="Alegreya Sans"/>
-              </a:rPr>
-              <a:t>Arabe — Courant</a:t>
-            </a:r>
-          </a:p>
-          <a:p>
-            <a:pPr algn="l">
-              <a:spcBef>
-                <a:spcPts val="600"/>
-              </a:spcBef>
-              <a:spcAft>
-                <a:spcPts val="300"/>
-              </a:spcAft>
-            </a:pPr>
-            <a:r>
-              <a:rPr sz="1300" b="1" i="0">
-                <a:solidFill>
-                  <a:srgbClr val="3AEDE5"/>
-                </a:solidFill>
-                <a:latin typeface="Alegreya Sans"/>
-              </a:rPr>
-              <a:t>FORMATION &amp; CERTIFICATIONS</a:t>
-            </a:r>
-          </a:p>
-          <a:p>
-            <a:pPr algn="l">
-              <a:spcAft>
-                <a:spcPts val="100"/>
-              </a:spcAft>
-            </a:pPr>
-            <a:r>
-              <a:rPr sz="1200" b="1" i="0">
-                <a:solidFill>
-                  <a:srgbClr val="3AEDE5"/>
-                </a:solidFill>
-                <a:latin typeface="Alegreya Sans"/>
-              </a:rPr>
-              <a:t>2024 — Présent  </a:t>
-            </a:r>
-            <a:r>
-              <a:rPr sz="1200" b="1" i="0">
-                <a:solidFill>
-                  <a:srgbClr val="FFFFFF"/>
-                </a:solidFill>
-                <a:latin typeface="Alegreya Sans"/>
-              </a:rPr>
-              <a:t>École de commerce INSEEC</a:t>
-            </a:r>
-          </a:p>
-          <a:p>
-            <a:pPr algn="l">
-              <a:spcAft>
-                <a:spcPts val="300"/>
-              </a:spcAft>
-            </a:pPr>
-            <a:r>
-              <a:rPr sz="1200" b="0" i="1">
-                <a:solidFill>
-                  <a:srgbClr val="CCD6E8"/>
-                </a:solidFill>
-                <a:latin typeface="Alegreya Sans"/>
-              </a:rPr>
-              <a:t>Bachelor Resp. de Projet Marketing &amp; Com</a:t>
-            </a:r>
-          </a:p>
-          <a:p>
-            <a:pPr algn="l">
-              <a:spcAft>
-                <a:spcPts val="100"/>
-              </a:spcAft>
-            </a:pPr>
-            <a:r>
-              <a:rPr sz="1200" b="1" i="0">
-                <a:solidFill>
-                  <a:srgbClr val="3AEDE5"/>
-                </a:solidFill>
-                <a:latin typeface="Alegreya Sans"/>
-              </a:rPr>
-              <a:t>Bac+3  </a:t>
-            </a:r>
-            <a:r>
-              <a:rPr sz="1200" b="1" i="0">
-                <a:solidFill>
-                  <a:srgbClr val="FFFFFF"/>
-                </a:solidFill>
-                <a:latin typeface="Alegreya Sans"/>
-              </a:rPr>
-              <a:t>Université des Sciences &amp; Technologies</a:t>
-            </a:r>
-          </a:p>
-          <a:p>
-            <a:pPr algn="l">
-              <a:spcAft>
-                <a:spcPts val="300"/>
-              </a:spcAft>
-            </a:pPr>
-            <a:r>
-              <a:rPr sz="1200" b="0" i="1">
-                <a:solidFill>
-                  <a:srgbClr val="CCD6E8"/>
-                </a:solidFill>
-                <a:latin typeface="Alegreya Sans"/>
-              </a:rPr>
-              <a:t>Recherche Opérationnelle</a:t>
-            </a:r>
-          </a:p>
-          <a:p>
-            <a:pPr algn="l">
-              <a:spcBef>
-                <a:spcPts val="600"/>
-              </a:spcBef>
-              <a:spcAft>
-                <a:spcPts val="300"/>
-              </a:spcAft>
-            </a:pPr>
-            <a:r>
-              <a:rPr sz="1300" b="1" i="0">
-                <a:solidFill>
-                  <a:srgbClr val="3AEDE5"/>
-                </a:solidFill>
-                <a:latin typeface="Alegreya Sans"/>
-              </a:rPr>
-              <a:t>CENTRES D'INTÉRÊT</a:t>
-            </a:r>
-          </a:p>
-          <a:p>
-            <a:pPr algn="l">
-              <a:spcAft>
-                <a:spcPts val="100"/>
-              </a:spcAft>
-            </a:pPr>
-            <a:r>
-              <a:rPr sz="1200" b="1" i="0">
-                <a:solidFill>
-                  <a:srgbClr val="3AEDE5"/>
-                </a:solidFill>
-                <a:latin typeface="Alegreya Sans"/>
-              </a:rPr>
-              <a:t>•  </a:t>
-            </a:r>
-            <a:r>
-              <a:rPr sz="1200" b="0" i="0">
-                <a:solidFill>
-                  <a:srgbClr val="FFFFFF"/>
-                </a:solidFill>
-                <a:latin typeface="Alegreya Sans"/>
-              </a:rPr>
-              <a:t>Cinéma (Wong Kar-Wai)</a:t>
-            </a:r>
-          </a:p>
-          <a:p>
-            <a:pPr algn="l">
-              <a:spcAft>
-                <a:spcPts val="100"/>
-              </a:spcAft>
-            </a:pPr>
-            <a:r>
-              <a:rPr sz="1200" b="1" i="0">
-                <a:solidFill>
-                  <a:srgbClr val="3AEDE5"/>
-                </a:solidFill>
-                <a:latin typeface="Alegreya Sans"/>
-              </a:rPr>
-              <a:t>•  </a:t>
-            </a:r>
-            <a:r>
-              <a:rPr sz="1200" b="0" i="0">
-                <a:solidFill>
-                  <a:srgbClr val="FFFFFF"/>
-                </a:solidFill>
-                <a:latin typeface="Alegreya Sans"/>
-              </a:rPr>
-              <a:t>Peinture &amp; croquis</a:t>
-            </a:r>
-          </a:p>
-          <a:p>
-            <a:pPr algn="l">
-              <a:spcAft>
-                <a:spcPts val="100"/>
-              </a:spcAft>
-            </a:pPr>
-            <a:r>
-              <a:rPr sz="1200" b="1" i="0">
-                <a:solidFill>
-                  <a:srgbClr val="3AEDE5"/>
-                </a:solidFill>
-                <a:latin typeface="Alegreya Sans"/>
-              </a:rPr>
-              <a:t>•  </a:t>
-            </a:r>
-            <a:r>
-              <a:rPr sz="1200" b="0" i="0">
-                <a:solidFill>
-                  <a:srgbClr val="FFFFFF"/>
-                </a:solidFill>
-                <a:latin typeface="Alegreya Sans"/>
-              </a:rPr>
-              <a:t>Mode</a:t>
-            </a:r>
-          </a:p>
-          <a:p>
-            <a:pPr algn="l">
-              <a:spcAft>
-                <a:spcPts val="100"/>
-              </a:spcAft>
-            </a:pPr>
-            <a:r>
-              <a:rPr sz="1200" b="1" i="0">
-                <a:solidFill>
-                  <a:srgbClr val="3AEDE5"/>
-                </a:solidFill>
-                <a:latin typeface="Alegreya Sans"/>
-              </a:rPr>
-              <a:t>•  </a:t>
-            </a:r>
-            <a:r>
-              <a:rPr sz="1200" b="0" i="0">
-                <a:solidFill>
-                  <a:srgbClr val="FFFFFF"/>
-                </a:solidFill>
-                <a:latin typeface="Alegreya Sans"/>
-              </a:rPr>
-              <a:t>Natation (compétition régionale)</a:t>
-            </a:r>
-          </a:p>
-        </p:txBody>
-      </p:sp>
-      <p:sp>
-        <p:nvSpPr>
-          <p:cNvPr id="9" name="TextBox 8"/>
-          <p:cNvSpPr txBox="1"/>
-          <p:nvPr/>
-        </p:nvSpPr>
-        <p:spPr>
-          <a:xfrm>
-            <a:off x="4528600" y="1180000"/>
-            <a:ext cx="7434800" cy="5318000"/>
-          </a:xfrm>
-          <a:prstGeom prst="rect">
-            <a:avLst/>
-          </a:prstGeom>
-          <a:noFill/>
-        </p:spPr>
-        <p:txBody>
-          <a:bodyPr wrap="square" lIns="0" rIns="0" tIns="0" bIns="0">
-            <a:spAutoFit/>
-          </a:bodyPr>
-          <a:lstStyle/>
-          <a:p>
-            <a:pPr algn="l">
-              <a:spcAft>
-                <a:spcPts val="300"/>
-              </a:spcAft>
-            </a:pPr>
-            <a:r>
-              <a:rPr sz="1300" b="1" i="0">
-                <a:solidFill>
-                  <a:srgbClr val="3AEDE5"/>
-                </a:solidFill>
-                <a:latin typeface="Alegreya Sans"/>
-              </a:rPr>
-              <a:t>EXPÉRIENCE PROFESSIONNELLE</a:t>
-            </a:r>
-          </a:p>
-          <a:p>
-            <a:pPr algn="l">
-              <a:spcAft>
-                <a:spcPts val="100"/>
-              </a:spcAft>
-            </a:pPr>
-            <a:r>
-              <a:rPr sz="1200" b="1" i="0">
-                <a:solidFill>
-                  <a:srgbClr val="3AEDE5"/>
-                </a:solidFill>
-                <a:latin typeface="Alegreya Sans"/>
-              </a:rPr>
-              <a:t>▸ </a:t>
-            </a:r>
-            <a:r>
-              <a:rPr sz="1200" b="1" i="0">
-                <a:solidFill>
-                  <a:srgbClr val="FFFFFF"/>
-                </a:solidFill>
-                <a:latin typeface="Alegreya Sans"/>
-              </a:rPr>
-              <a:t>Galerie Joseph (réseau de 30 espaces, Le Marais)</a:t>
-            </a:r>
-            <a:r>
-              <a:rPr sz="1200" b="0" i="0">
-                <a:solidFill>
-                  <a:srgbClr val="FFFFFF"/>
-                </a:solidFill>
-                <a:latin typeface="Alegreya Sans"/>
-              </a:rPr>
-              <a:t> — Assistante chef de projet Communication / Event</a:t>
-            </a:r>
-            <a:r>
-              <a:rPr sz="1200" b="0" i="1">
-                <a:solidFill>
-                  <a:srgbClr val="3AEDE5"/>
-                </a:solidFill>
-                <a:latin typeface="Alegreya Sans"/>
-              </a:rPr>
-              <a:t>  (Juin — Déc. 2025)</a:t>
-            </a:r>
-          </a:p>
-          <a:p>
-            <a:pPr algn="l" lvl="1">
-              <a:spcAft>
-                <a:spcPts val="100"/>
-              </a:spcAft>
-            </a:pPr>
-            <a:r>
-              <a:rPr sz="1200" b="1" i="0">
-                <a:solidFill>
-                  <a:srgbClr val="3AEDE5"/>
-                </a:solidFill>
-                <a:latin typeface="Alegreya Sans"/>
-              </a:rPr>
-              <a:t>•  </a:t>
-            </a:r>
-            <a:r>
-              <a:rPr sz="1200" b="0" i="0">
-                <a:solidFill>
-                  <a:srgbClr val="FFFFFF"/>
-                </a:solidFill>
-                <a:latin typeface="Alegreya Sans"/>
-              </a:rPr>
-              <a:t>Création de contenus visuels et publications réseaux sociaux, site web, newsletters (Photoshop, Canva, Premiere Pro, Indesign).</a:t>
-            </a:r>
-          </a:p>
-          <a:p>
-            <a:pPr algn="l" lvl="1">
-              <a:spcAft>
-                <a:spcPts val="100"/>
-              </a:spcAft>
-            </a:pPr>
-            <a:r>
-              <a:rPr sz="1200" b="1" i="0">
-                <a:solidFill>
-                  <a:srgbClr val="3AEDE5"/>
-                </a:solidFill>
-                <a:latin typeface="Alegreya Sans"/>
-              </a:rPr>
-              <a:t>•  </a:t>
-            </a:r>
-            <a:r>
-              <a:rPr sz="1200" b="0" i="0">
-                <a:solidFill>
-                  <a:srgbClr val="FFFFFF"/>
-                </a:solidFill>
-                <a:latin typeface="Alegreya Sans"/>
-              </a:rPr>
-              <a:t>Pilotage d'une campagne emailing Mailchimp : +100 % de fréquentation visiteurs et +60 % d'inscriptions vs édition précédente (1 300 vs 800).</a:t>
-            </a:r>
-          </a:p>
-          <a:p>
-            <a:pPr algn="l">
-              <a:spcAft>
-                <a:spcPts val="100"/>
-              </a:spcAft>
-            </a:pPr>
-            <a:r>
-              <a:rPr sz="1200" b="1" i="0">
-                <a:solidFill>
-                  <a:srgbClr val="3AEDE5"/>
-                </a:solidFill>
-                <a:latin typeface="Alegreya Sans"/>
-              </a:rPr>
-              <a:t>▸ </a:t>
-            </a:r>
-            <a:r>
-              <a:rPr sz="1200" b="1" i="0">
-                <a:solidFill>
-                  <a:srgbClr val="FFFFFF"/>
-                </a:solidFill>
-                <a:latin typeface="Alegreya Sans"/>
-              </a:rPr>
-              <a:t>IPM (Groupe presse belge)</a:t>
-            </a:r>
-            <a:r>
-              <a:rPr sz="1200" b="0" i="0">
-                <a:solidFill>
-                  <a:srgbClr val="FFFFFF"/>
-                </a:solidFill>
-                <a:latin typeface="Alegreya Sans"/>
-              </a:rPr>
-              <a:t> — Responsable des relations clients</a:t>
-            </a:r>
-            <a:r>
-              <a:rPr sz="1200" b="0" i="1">
-                <a:solidFill>
-                  <a:srgbClr val="3AEDE5"/>
-                </a:solidFill>
-                <a:latin typeface="Alegreya Sans"/>
-              </a:rPr>
-              <a:t>  (Sept. 2023 — Août 2024)</a:t>
-            </a:r>
-          </a:p>
-          <a:p>
-            <a:pPr algn="l" lvl="1">
-              <a:spcAft>
-                <a:spcPts val="100"/>
-              </a:spcAft>
-            </a:pPr>
-            <a:r>
-              <a:rPr sz="1200" b="1" i="0">
-                <a:solidFill>
-                  <a:srgbClr val="3AEDE5"/>
-                </a:solidFill>
-                <a:latin typeface="Alegreya Sans"/>
-              </a:rPr>
-              <a:t>•  </a:t>
-            </a:r>
-            <a:r>
-              <a:rPr sz="1200" b="0" i="0">
-                <a:solidFill>
-                  <a:srgbClr val="FFFFFF"/>
-                </a:solidFill>
-                <a:latin typeface="Alegreya Sans"/>
-              </a:rPr>
-              <a:t>Contribution à l'optimisation des outils et processus CRM (reporting, tableaux de bord).</a:t>
-            </a:r>
-          </a:p>
-          <a:p>
-            <a:pPr algn="l" lvl="1">
-              <a:spcAft>
-                <a:spcPts val="100"/>
-              </a:spcAft>
-            </a:pPr>
-            <a:r>
-              <a:rPr sz="1200" b="1" i="0">
-                <a:solidFill>
-                  <a:srgbClr val="3AEDE5"/>
-                </a:solidFill>
-                <a:latin typeface="Alegreya Sans"/>
-              </a:rPr>
-              <a:t>•  </a:t>
-            </a:r>
-            <a:r>
-              <a:rPr sz="1200" b="0" i="0">
-                <a:solidFill>
-                  <a:srgbClr val="FFFFFF"/>
-                </a:solidFill>
-                <a:latin typeface="Alegreya Sans"/>
-              </a:rPr>
-              <a:t>Prise en charge et suivi des demandes clients en Front Office et Back Office (analyse, mise à jour, résolution).</a:t>
-            </a:r>
-          </a:p>
-          <a:p>
-            <a:pPr algn="l">
-              <a:spcAft>
-                <a:spcPts val="100"/>
-              </a:spcAft>
-            </a:pPr>
-            <a:r>
-              <a:rPr sz="1200" b="1" i="0">
-                <a:solidFill>
-                  <a:srgbClr val="3AEDE5"/>
-                </a:solidFill>
-                <a:latin typeface="Alegreya Sans"/>
-              </a:rPr>
-              <a:t>▸ </a:t>
-            </a:r>
-            <a:r>
-              <a:rPr sz="1200" b="1" i="0">
-                <a:solidFill>
-                  <a:srgbClr val="FFFFFF"/>
-                </a:solidFill>
-                <a:latin typeface="Alegreya Sans"/>
-              </a:rPr>
-              <a:t>KOMNOW (agence de marketing digital)</a:t>
-            </a:r>
-            <a:r>
-              <a:rPr sz="1200" b="0" i="0">
-                <a:solidFill>
-                  <a:srgbClr val="FFFFFF"/>
-                </a:solidFill>
-                <a:latin typeface="Alegreya Sans"/>
-              </a:rPr>
-              <a:t> — Commercial / Assistante Marketing</a:t>
-            </a:r>
-            <a:r>
-              <a:rPr sz="1200" b="0" i="1">
-                <a:solidFill>
-                  <a:srgbClr val="3AEDE5"/>
-                </a:solidFill>
-                <a:latin typeface="Alegreya Sans"/>
-              </a:rPr>
-              <a:t>  (Janv. 2020 — Août 2023)</a:t>
-            </a:r>
-          </a:p>
-          <a:p>
-            <a:pPr algn="l" lvl="1">
-              <a:spcAft>
-                <a:spcPts val="100"/>
-              </a:spcAft>
-            </a:pPr>
-            <a:r>
-              <a:rPr sz="1200" b="1" i="0">
-                <a:solidFill>
-                  <a:srgbClr val="3AEDE5"/>
-                </a:solidFill>
-                <a:latin typeface="Alegreya Sans"/>
-              </a:rPr>
-              <a:t>•  </a:t>
-            </a:r>
-            <a:r>
-              <a:rPr sz="1200" b="0" i="0">
-                <a:solidFill>
-                  <a:srgbClr val="FFFFFF"/>
-                </a:solidFill>
-                <a:latin typeface="Alegreya Sans"/>
-              </a:rPr>
-              <a:t>Prospection et analyse de marché ; élaboration des propositions commerciales ; suivi et fidélisation clients.</a:t>
-            </a:r>
-          </a:p>
-          <a:p>
-            <a:pPr algn="l" lvl="1">
-              <a:spcAft>
-                <a:spcPts val="100"/>
-              </a:spcAft>
-            </a:pPr>
-            <a:r>
-              <a:rPr sz="1200" b="1" i="0">
-                <a:solidFill>
-                  <a:srgbClr val="3AEDE5"/>
-                </a:solidFill>
-                <a:latin typeface="Alegreya Sans"/>
-              </a:rPr>
-              <a:t>•  </a:t>
-            </a:r>
-            <a:r>
-              <a:rPr sz="1200" b="0" i="0">
-                <a:solidFill>
-                  <a:srgbClr val="FFFFFF"/>
-                </a:solidFill>
-                <a:latin typeface="Alegreya Sans"/>
-              </a:rPr>
-              <a:t>Création de supports de communication (flyers, visuels, newsletters, contenus digitaux) ; gestion des réseaux sociaux.</a:t>
-            </a:r>
-          </a:p>
-        </p:txBody>
-      </p:sp>
       <p:sp>
         <p:nvSpPr>
           <p:cNvPr id="10" name="TextBox 9"/>
@@ -4200,61 +4189,6 @@
           <a:xfrm>
             <a:off x="0" y="0"/>
             <a:ext cx="12192000" cy="6858000"/>
-          </a:xfrm>
-          <a:prstGeom prst="rect">
-            <a:avLst/>
-          </a:prstGeom>
-          <a:ln>
-            <a:noFill/>
-          </a:ln>
-          <a:effectLst/>
-          <a:gradFill flip="none" rotWithShape="1">
-            <a:gsLst>
-              <a:gs pos="0">
-                <a:srgbClr val="07227A"/>
-              </a:gs>
-              <a:gs pos="85000">
-                <a:srgbClr val="07227A"/>
-              </a:gs>
-              <a:gs pos="100000">
-                <a:srgbClr val="1FCBD9"/>
-              </a:gs>
-            </a:gsLst>
-            <a:lin ang="2700000" scaled="0"/>
-          </a:gradFill>
-        </p:spPr>
-        <p:style>
-          <a:lnRef idx="1">
-            <a:schemeClr val="accent1"/>
-          </a:lnRef>
-          <a:fillRef idx="3">
-            <a:schemeClr val="accent1"/>
-          </a:fillRef>
-          <a:effectRef idx="2">
-            <a:schemeClr val="accent1"/>
-          </a:effectRef>
-          <a:fontRef idx="minor">
-            <a:schemeClr val="lt1"/>
-          </a:fontRef>
-        </p:style>
-        <p:txBody>
-          <a:bodyPr rtlCol="0" anchor="ctr"/>
-          <a:lstStyle/>
-          <a:p>
-            <a:pPr algn="ctr"/>
-          </a:p>
-        </p:txBody>
-      </p:sp>
-      <p:sp>
-        <p:nvSpPr>
-          <p:cNvPr id="3" name="Rectangle 2"/>
-          <p:cNvSpPr/>
-          <p:nvPr/>
-        </p:nvSpPr>
-        <p:spPr>
-          <a:xfrm>
-            <a:off x="0" y="0"/>
-            <a:ext cx="4300000" cy="6858000"/>
           </a:xfrm>
           <a:prstGeom prst="rect">
             <a:avLst/>
@@ -4291,7 +4225,956 @@
       </p:sp>
       <p:sp>
         <p:nvSpPr>
-          <p:cNvPr id="4" name="Rectangle 3"/>
+          <p:cNvPr id="3" name="Rectangle 2"/>
+          <p:cNvSpPr/>
+          <p:nvPr/>
+        </p:nvSpPr>
+        <p:spPr>
+          <a:xfrm>
+            <a:off x="4300000" y="0"/>
+            <a:ext cx="15000" cy="6858000"/>
+          </a:xfrm>
+          <a:prstGeom prst="rect">
+            <a:avLst/>
+          </a:prstGeom>
+          <a:solidFill>
+            <a:srgbClr val="3AEDE5"/>
+          </a:solidFill>
+          <a:ln>
+            <a:noFill/>
+          </a:ln>
+          <a:effectLst/>
+        </p:spPr>
+        <p:style>
+          <a:lnRef idx="1">
+            <a:schemeClr val="accent1"/>
+          </a:lnRef>
+          <a:fillRef idx="3">
+            <a:schemeClr val="accent1"/>
+          </a:fillRef>
+          <a:effectRef idx="2">
+            <a:schemeClr val="accent1"/>
+          </a:effectRef>
+          <a:fontRef idx="minor">
+            <a:schemeClr val="lt1"/>
+          </a:fontRef>
+        </p:style>
+        <p:txBody>
+          <a:bodyPr rtlCol="0" anchor="ctr"/>
+          <a:lstStyle/>
+          <a:p>
+            <a:pPr algn="ctr"/>
+          </a:p>
+        </p:txBody>
+      </p:sp>
+      <p:pic>
+        <p:nvPicPr>
+          <p:cNvPr id="4" name="Picture 3" descr="inside_circle_logo.png"/>
+          <p:cNvPicPr>
+            <a:picLocks noChangeAspect="1"/>
+          </p:cNvPicPr>
+          <p:nvPr/>
+        </p:nvPicPr>
+        <p:blipFill>
+          <a:blip r:embed="rId2"/>
+          <a:stretch>
+            <a:fillRect/>
+          </a:stretch>
+        </p:blipFill>
+        <p:spPr>
+          <a:xfrm>
+            <a:off x="10660000" y="130000"/>
+            <a:ext cx="1302000" cy="420000"/>
+          </a:xfrm>
+          <a:prstGeom prst="rect">
+            <a:avLst/>
+          </a:prstGeom>
+        </p:spPr>
+      </p:pic>
+      <p:sp>
+        <p:nvSpPr>
+          <p:cNvPr id="5" name="TextBox 4"/>
+          <p:cNvSpPr txBox="1"/>
+          <p:nvPr/>
+        </p:nvSpPr>
+        <p:spPr>
+          <a:xfrm>
+            <a:off x="228600" y="260000"/>
+            <a:ext cx="3842800" cy="800000"/>
+          </a:xfrm>
+          <a:prstGeom prst="rect">
+            <a:avLst/>
+          </a:prstGeom>
+          <a:noFill/>
+        </p:spPr>
+        <p:txBody>
+          <a:bodyPr wrap="square" lIns="0" rIns="0" tIns="0" bIns="0">
+            <a:spAutoFit/>
+          </a:bodyPr>
+          <a:lstStyle/>
+          <a:p>
+            <a:pPr algn="l"/>
+            <a:r>
+              <a:rPr sz="4800" b="1" i="0">
+                <a:solidFill>
+                  <a:srgbClr val="3AEDE5"/>
+                </a:solidFill>
+                <a:latin typeface="Alegreya Sans"/>
+              </a:rPr>
+              <a:t>C.H.</a:t>
+            </a:r>
+          </a:p>
+        </p:txBody>
+      </p:sp>
+      <p:sp>
+        <p:nvSpPr>
+          <p:cNvPr id="6" name="TextBox 5"/>
+          <p:cNvSpPr txBox="1"/>
+          <p:nvPr/>
+        </p:nvSpPr>
+        <p:spPr>
+          <a:xfrm>
+            <a:off x="4528600" y="300000"/>
+            <a:ext cx="5963400" cy="800000"/>
+          </a:xfrm>
+          <a:prstGeom prst="rect">
+            <a:avLst/>
+          </a:prstGeom>
+          <a:noFill/>
+        </p:spPr>
+        <p:txBody>
+          <a:bodyPr wrap="square" lIns="0" rIns="0" tIns="0" bIns="0">
+            <a:spAutoFit/>
+          </a:bodyPr>
+          <a:lstStyle/>
+          <a:p>
+            <a:r>
+              <a:rPr sz="2400" b="1" i="0">
+                <a:solidFill>
+                  <a:srgbClr val="FFFFFF"/>
+                </a:solidFill>
+                <a:latin typeface="Alegreya Sans"/>
+              </a:rPr>
+              <a:t>Content Creation &amp; Digital Marketing Officer</a:t>
+            </a:r>
+          </a:p>
+          <a:p>
+            <a:pPr>
+              <a:spcBef>
+                <a:spcPts val="200"/>
+              </a:spcBef>
+            </a:pPr>
+            <a:r>
+              <a:rPr sz="1500" b="0" i="1">
+                <a:solidFill>
+                  <a:srgbClr val="3AEDE5"/>
+                </a:solidFill>
+                <a:latin typeface="Alegreya Sans"/>
+              </a:rPr>
+              <a:t>Digital Marketing — Content Creation (work-study)</a:t>
+            </a:r>
+          </a:p>
+        </p:txBody>
+      </p:sp>
+      <p:sp>
+        <p:nvSpPr>
+          <p:cNvPr id="7" name="TextBox 6"/>
+          <p:cNvSpPr txBox="1"/>
+          <p:nvPr/>
+        </p:nvSpPr>
+        <p:spPr>
+          <a:xfrm>
+            <a:off x="228600" y="1180000"/>
+            <a:ext cx="3842800" cy="5318000"/>
+          </a:xfrm>
+          <a:prstGeom prst="rect">
+            <a:avLst/>
+          </a:prstGeom>
+          <a:noFill/>
+        </p:spPr>
+        <p:txBody>
+          <a:bodyPr wrap="square" lIns="0" rIns="0" tIns="0" bIns="0">
+            <a:spAutoFit/>
+          </a:bodyPr>
+          <a:lstStyle/>
+          <a:p>
+            <a:pPr algn="l">
+              <a:spcAft>
+                <a:spcPts val="300"/>
+              </a:spcAft>
+            </a:pPr>
+            <a:r>
+              <a:rPr sz="1300" b="1" i="0">
+                <a:solidFill>
+                  <a:srgbClr val="3AEDE5"/>
+                </a:solidFill>
+                <a:latin typeface="Alegreya Sans"/>
+              </a:rPr>
+              <a:t>MAIN AREAS OF EXPERTISE</a:t>
+            </a:r>
+          </a:p>
+          <a:p>
+            <a:pPr algn="l">
+              <a:spcAft>
+                <a:spcPts val="100"/>
+              </a:spcAft>
+            </a:pPr>
+            <a:r>
+              <a:rPr sz="1200" b="1" i="0">
+                <a:solidFill>
+                  <a:srgbClr val="3AEDE5"/>
+                </a:solidFill>
+                <a:latin typeface="Alegreya Sans"/>
+              </a:rPr>
+              <a:t>•  </a:t>
+            </a:r>
+            <a:r>
+              <a:rPr sz="1200" b="0" i="0">
+                <a:solidFill>
+                  <a:srgbClr val="FFFFFF"/>
+                </a:solidFill>
+                <a:latin typeface="Alegreya Sans"/>
+              </a:rPr>
+              <a:t>Content creation (social &amp; web)</a:t>
+            </a:r>
+          </a:p>
+          <a:p>
+            <a:pPr algn="l">
+              <a:spcAft>
+                <a:spcPts val="100"/>
+              </a:spcAft>
+            </a:pPr>
+            <a:r>
+              <a:rPr sz="1200" b="1" i="0">
+                <a:solidFill>
+                  <a:srgbClr val="3AEDE5"/>
+                </a:solidFill>
+                <a:latin typeface="Alegreya Sans"/>
+              </a:rPr>
+              <a:t>•  </a:t>
+            </a:r>
+            <a:r>
+              <a:rPr sz="1200" b="0" i="0">
+                <a:solidFill>
+                  <a:srgbClr val="FFFFFF"/>
+                </a:solidFill>
+                <a:latin typeface="Alegreya Sans"/>
+              </a:rPr>
+              <a:t>Event marketing</a:t>
+            </a:r>
+          </a:p>
+          <a:p>
+            <a:pPr algn="l">
+              <a:spcAft>
+                <a:spcPts val="100"/>
+              </a:spcAft>
+            </a:pPr>
+            <a:r>
+              <a:rPr sz="1200" b="1" i="0">
+                <a:solidFill>
+                  <a:srgbClr val="3AEDE5"/>
+                </a:solidFill>
+                <a:latin typeface="Alegreya Sans"/>
+              </a:rPr>
+              <a:t>•  </a:t>
+            </a:r>
+            <a:r>
+              <a:rPr sz="1200" b="0" i="0">
+                <a:solidFill>
+                  <a:srgbClr val="FFFFFF"/>
+                </a:solidFill>
+                <a:latin typeface="Alegreya Sans"/>
+              </a:rPr>
+              <a:t>Emailing &amp; campaigns (Mailchimp)</a:t>
+            </a:r>
+          </a:p>
+          <a:p>
+            <a:pPr algn="l">
+              <a:spcAft>
+                <a:spcPts val="100"/>
+              </a:spcAft>
+            </a:pPr>
+            <a:r>
+              <a:rPr sz="1200" b="1" i="0">
+                <a:solidFill>
+                  <a:srgbClr val="3AEDE5"/>
+                </a:solidFill>
+                <a:latin typeface="Alegreya Sans"/>
+              </a:rPr>
+              <a:t>•  </a:t>
+            </a:r>
+            <a:r>
+              <a:rPr sz="1200" b="0" i="0">
+                <a:solidFill>
+                  <a:srgbClr val="FFFFFF"/>
+                </a:solidFill>
+                <a:latin typeface="Alegreya Sans"/>
+              </a:rPr>
+              <a:t>CRM &amp; client relations</a:t>
+            </a:r>
+          </a:p>
+          <a:p>
+            <a:pPr algn="l">
+              <a:spcAft>
+                <a:spcPts val="100"/>
+              </a:spcAft>
+            </a:pPr>
+            <a:r>
+              <a:rPr sz="1200" b="1" i="0">
+                <a:solidFill>
+                  <a:srgbClr val="3AEDE5"/>
+                </a:solidFill>
+                <a:latin typeface="Alegreya Sans"/>
+              </a:rPr>
+              <a:t>•  </a:t>
+            </a:r>
+            <a:r>
+              <a:rPr sz="1200" b="0" i="0">
+                <a:solidFill>
+                  <a:srgbClr val="FFFFFF"/>
+                </a:solidFill>
+                <a:latin typeface="Alegreya Sans"/>
+              </a:rPr>
+              <a:t>Reporting (GA, Meta, Excel)</a:t>
+            </a:r>
+          </a:p>
+          <a:p>
+            <a:pPr algn="l">
+              <a:spcBef>
+                <a:spcPts val="600"/>
+              </a:spcBef>
+              <a:spcAft>
+                <a:spcPts val="300"/>
+              </a:spcAft>
+            </a:pPr>
+            <a:r>
+              <a:rPr sz="1300" b="1" i="0">
+                <a:solidFill>
+                  <a:srgbClr val="3AEDE5"/>
+                </a:solidFill>
+                <a:latin typeface="Alegreya Sans"/>
+              </a:rPr>
+              <a:t>LANGUAGES</a:t>
+            </a:r>
+          </a:p>
+          <a:p>
+            <a:pPr algn="l">
+              <a:spcAft>
+                <a:spcPts val="100"/>
+              </a:spcAft>
+            </a:pPr>
+            <a:r>
+              <a:rPr sz="1200" b="1" i="0">
+                <a:solidFill>
+                  <a:srgbClr val="3AEDE5"/>
+                </a:solidFill>
+                <a:latin typeface="Alegreya Sans"/>
+              </a:rPr>
+              <a:t>•  </a:t>
+            </a:r>
+            <a:r>
+              <a:rPr sz="1200" b="0" i="0">
+                <a:solidFill>
+                  <a:srgbClr val="FFFFFF"/>
+                </a:solidFill>
+                <a:latin typeface="Alegreya Sans"/>
+              </a:rPr>
+              <a:t>French — Fluent</a:t>
+            </a:r>
+          </a:p>
+          <a:p>
+            <a:pPr algn="l">
+              <a:spcAft>
+                <a:spcPts val="100"/>
+              </a:spcAft>
+            </a:pPr>
+            <a:r>
+              <a:rPr sz="1200" b="1" i="0">
+                <a:solidFill>
+                  <a:srgbClr val="3AEDE5"/>
+                </a:solidFill>
+                <a:latin typeface="Alegreya Sans"/>
+              </a:rPr>
+              <a:t>•  </a:t>
+            </a:r>
+            <a:r>
+              <a:rPr sz="1200" b="0" i="0">
+                <a:solidFill>
+                  <a:srgbClr val="FFFFFF"/>
+                </a:solidFill>
+                <a:latin typeface="Alegreya Sans"/>
+              </a:rPr>
+              <a:t>English — Fluent</a:t>
+            </a:r>
+          </a:p>
+          <a:p>
+            <a:pPr algn="l">
+              <a:spcAft>
+                <a:spcPts val="100"/>
+              </a:spcAft>
+            </a:pPr>
+            <a:r>
+              <a:rPr sz="1200" b="1" i="0">
+                <a:solidFill>
+                  <a:srgbClr val="3AEDE5"/>
+                </a:solidFill>
+                <a:latin typeface="Alegreya Sans"/>
+              </a:rPr>
+              <a:t>•  </a:t>
+            </a:r>
+            <a:r>
+              <a:rPr sz="1200" b="0" i="0">
+                <a:solidFill>
+                  <a:srgbClr val="FFFFFF"/>
+                </a:solidFill>
+                <a:latin typeface="Alegreya Sans"/>
+              </a:rPr>
+              <a:t>Arabic — Fluent</a:t>
+            </a:r>
+          </a:p>
+          <a:p>
+            <a:pPr algn="l">
+              <a:spcBef>
+                <a:spcPts val="600"/>
+              </a:spcBef>
+              <a:spcAft>
+                <a:spcPts val="300"/>
+              </a:spcAft>
+            </a:pPr>
+            <a:r>
+              <a:rPr sz="1300" b="1" i="0">
+                <a:solidFill>
+                  <a:srgbClr val="3AEDE5"/>
+                </a:solidFill>
+                <a:latin typeface="Alegreya Sans"/>
+              </a:rPr>
+              <a:t>EDUCATION &amp; CERTIFICATIONS</a:t>
+            </a:r>
+          </a:p>
+          <a:p>
+            <a:pPr algn="l">
+              <a:spcAft>
+                <a:spcPts val="100"/>
+              </a:spcAft>
+            </a:pPr>
+            <a:r>
+              <a:rPr sz="1200" b="1" i="0">
+                <a:solidFill>
+                  <a:srgbClr val="3AEDE5"/>
+                </a:solidFill>
+                <a:latin typeface="Alegreya Sans"/>
+              </a:rPr>
+              <a:t>2024 — Present  </a:t>
+            </a:r>
+            <a:r>
+              <a:rPr sz="1200" b="1" i="0">
+                <a:solidFill>
+                  <a:srgbClr val="FFFFFF"/>
+                </a:solidFill>
+                <a:latin typeface="Alegreya Sans"/>
+              </a:rPr>
+              <a:t>INSEEC Business School</a:t>
+            </a:r>
+          </a:p>
+          <a:p>
+            <a:pPr algn="l">
+              <a:spcAft>
+                <a:spcPts val="300"/>
+              </a:spcAft>
+            </a:pPr>
+            <a:r>
+              <a:rPr sz="1200" b="0" i="1">
+                <a:solidFill>
+                  <a:srgbClr val="CCD6E8"/>
+                </a:solidFill>
+                <a:latin typeface="Alegreya Sans"/>
+              </a:rPr>
+              <a:t>Bachelor Marketing &amp; Communication PM</a:t>
+            </a:r>
+          </a:p>
+          <a:p>
+            <a:pPr algn="l">
+              <a:spcAft>
+                <a:spcPts val="100"/>
+              </a:spcAft>
+            </a:pPr>
+            <a:r>
+              <a:rPr sz="1200" b="1" i="0">
+                <a:solidFill>
+                  <a:srgbClr val="3AEDE5"/>
+                </a:solidFill>
+                <a:latin typeface="Alegreya Sans"/>
+              </a:rPr>
+              <a:t>BSc 3  </a:t>
+            </a:r>
+            <a:r>
+              <a:rPr sz="1200" b="1" i="0">
+                <a:solidFill>
+                  <a:srgbClr val="FFFFFF"/>
+                </a:solidFill>
+                <a:latin typeface="Alegreya Sans"/>
+              </a:rPr>
+              <a:t>University of Sciences &amp; Technology</a:t>
+            </a:r>
+          </a:p>
+          <a:p>
+            <a:pPr algn="l">
+              <a:spcAft>
+                <a:spcPts val="300"/>
+              </a:spcAft>
+            </a:pPr>
+            <a:r>
+              <a:rPr sz="1200" b="0" i="1">
+                <a:solidFill>
+                  <a:srgbClr val="CCD6E8"/>
+                </a:solidFill>
+                <a:latin typeface="Alegreya Sans"/>
+              </a:rPr>
+              <a:t>Operations Research</a:t>
+            </a:r>
+          </a:p>
+          <a:p>
+            <a:pPr algn="l">
+              <a:spcBef>
+                <a:spcPts val="600"/>
+              </a:spcBef>
+              <a:spcAft>
+                <a:spcPts val="300"/>
+              </a:spcAft>
+            </a:pPr>
+            <a:r>
+              <a:rPr sz="1300" b="1" i="0">
+                <a:solidFill>
+                  <a:srgbClr val="3AEDE5"/>
+                </a:solidFill>
+                <a:latin typeface="Alegreya Sans"/>
+              </a:rPr>
+              <a:t>INTERESTS</a:t>
+            </a:r>
+          </a:p>
+          <a:p>
+            <a:pPr algn="l">
+              <a:spcAft>
+                <a:spcPts val="100"/>
+              </a:spcAft>
+            </a:pPr>
+            <a:r>
+              <a:rPr sz="1200" b="1" i="0">
+                <a:solidFill>
+                  <a:srgbClr val="3AEDE5"/>
+                </a:solidFill>
+                <a:latin typeface="Alegreya Sans"/>
+              </a:rPr>
+              <a:t>•  </a:t>
+            </a:r>
+            <a:r>
+              <a:rPr sz="1200" b="0" i="0">
+                <a:solidFill>
+                  <a:srgbClr val="FFFFFF"/>
+                </a:solidFill>
+                <a:latin typeface="Alegreya Sans"/>
+              </a:rPr>
+              <a:t>Cinema (Wong Kar-Wai)</a:t>
+            </a:r>
+          </a:p>
+          <a:p>
+            <a:pPr algn="l">
+              <a:spcAft>
+                <a:spcPts val="100"/>
+              </a:spcAft>
+            </a:pPr>
+            <a:r>
+              <a:rPr sz="1200" b="1" i="0">
+                <a:solidFill>
+                  <a:srgbClr val="3AEDE5"/>
+                </a:solidFill>
+                <a:latin typeface="Alegreya Sans"/>
+              </a:rPr>
+              <a:t>•  </a:t>
+            </a:r>
+            <a:r>
+              <a:rPr sz="1200" b="0" i="0">
+                <a:solidFill>
+                  <a:srgbClr val="FFFFFF"/>
+                </a:solidFill>
+                <a:latin typeface="Alegreya Sans"/>
+              </a:rPr>
+              <a:t>Painting &amp; sketching</a:t>
+            </a:r>
+          </a:p>
+          <a:p>
+            <a:pPr algn="l">
+              <a:spcAft>
+                <a:spcPts val="100"/>
+              </a:spcAft>
+            </a:pPr>
+            <a:r>
+              <a:rPr sz="1200" b="1" i="0">
+                <a:solidFill>
+                  <a:srgbClr val="3AEDE5"/>
+                </a:solidFill>
+                <a:latin typeface="Alegreya Sans"/>
+              </a:rPr>
+              <a:t>•  </a:t>
+            </a:r>
+            <a:r>
+              <a:rPr sz="1200" b="0" i="0">
+                <a:solidFill>
+                  <a:srgbClr val="FFFFFF"/>
+                </a:solidFill>
+                <a:latin typeface="Alegreya Sans"/>
+              </a:rPr>
+              <a:t>Fashion</a:t>
+            </a:r>
+          </a:p>
+          <a:p>
+            <a:pPr algn="l">
+              <a:spcAft>
+                <a:spcPts val="100"/>
+              </a:spcAft>
+            </a:pPr>
+            <a:r>
+              <a:rPr sz="1200" b="1" i="0">
+                <a:solidFill>
+                  <a:srgbClr val="3AEDE5"/>
+                </a:solidFill>
+                <a:latin typeface="Alegreya Sans"/>
+              </a:rPr>
+              <a:t>•  </a:t>
+            </a:r>
+            <a:r>
+              <a:rPr sz="1200" b="0" i="0">
+                <a:solidFill>
+                  <a:srgbClr val="FFFFFF"/>
+                </a:solidFill>
+                <a:latin typeface="Alegreya Sans"/>
+              </a:rPr>
+              <a:t>Swimming (regional competition)</a:t>
+            </a:r>
+          </a:p>
+        </p:txBody>
+      </p:sp>
+      <p:sp>
+        <p:nvSpPr>
+          <p:cNvPr id="8" name="TextBox 7"/>
+          <p:cNvSpPr txBox="1"/>
+          <p:nvPr/>
+        </p:nvSpPr>
+        <p:spPr>
+          <a:xfrm>
+            <a:off x="4528600" y="1180000"/>
+            <a:ext cx="7434800" cy="5318000"/>
+          </a:xfrm>
+          <a:prstGeom prst="rect">
+            <a:avLst/>
+          </a:prstGeom>
+          <a:noFill/>
+        </p:spPr>
+        <p:txBody>
+          <a:bodyPr wrap="square" lIns="0" rIns="0" tIns="0" bIns="0">
+            <a:spAutoFit/>
+          </a:bodyPr>
+          <a:lstStyle/>
+          <a:p>
+            <a:pPr algn="l">
+              <a:spcAft>
+                <a:spcPts val="300"/>
+              </a:spcAft>
+            </a:pPr>
+            <a:r>
+              <a:rPr sz="1300" b="1" i="0">
+                <a:solidFill>
+                  <a:srgbClr val="3AEDE5"/>
+                </a:solidFill>
+                <a:latin typeface="Alegreya Sans"/>
+              </a:rPr>
+              <a:t>PROFESSIONAL EXPERIENCE</a:t>
+            </a:r>
+          </a:p>
+          <a:p>
+            <a:pPr algn="l">
+              <a:spcAft>
+                <a:spcPts val="100"/>
+              </a:spcAft>
+            </a:pPr>
+            <a:r>
+              <a:rPr sz="1200" b="1" i="0">
+                <a:solidFill>
+                  <a:srgbClr val="3AEDE5"/>
+                </a:solidFill>
+                <a:latin typeface="Alegreya Sans"/>
+              </a:rPr>
+              <a:t>▸ </a:t>
+            </a:r>
+            <a:r>
+              <a:rPr sz="1200" b="1" i="0">
+                <a:solidFill>
+                  <a:srgbClr val="FFFFFF"/>
+                </a:solidFill>
+                <a:latin typeface="Alegreya Sans"/>
+              </a:rPr>
+              <a:t>Galerie Joseph (network of 30 venues, Le Marais)</a:t>
+            </a:r>
+            <a:r>
+              <a:rPr sz="1200" b="0" i="0">
+                <a:solidFill>
+                  <a:srgbClr val="FFFFFF"/>
+                </a:solidFill>
+                <a:latin typeface="Alegreya Sans"/>
+              </a:rPr>
+              <a:t> — Communication / Event Project Assistant</a:t>
+            </a:r>
+            <a:r>
+              <a:rPr sz="1200" b="0" i="1">
+                <a:solidFill>
+                  <a:srgbClr val="3AEDE5"/>
+                </a:solidFill>
+                <a:latin typeface="Alegreya Sans"/>
+              </a:rPr>
+              <a:t>  (June — Dec. 2025)</a:t>
+            </a:r>
+          </a:p>
+          <a:p>
+            <a:pPr algn="l" lvl="1">
+              <a:spcAft>
+                <a:spcPts val="100"/>
+              </a:spcAft>
+            </a:pPr>
+            <a:r>
+              <a:rPr sz="1200" b="1" i="0">
+                <a:solidFill>
+                  <a:srgbClr val="3AEDE5"/>
+                </a:solidFill>
+                <a:latin typeface="Alegreya Sans"/>
+              </a:rPr>
+              <a:t>•  </a:t>
+            </a:r>
+            <a:r>
+              <a:rPr sz="1200" b="0" i="0">
+                <a:solidFill>
+                  <a:srgbClr val="FFFFFF"/>
+                </a:solidFill>
+                <a:latin typeface="Alegreya Sans"/>
+              </a:rPr>
+              <a:t>Created visual content and publications for social media, website and newsletters (Photoshop, Canva, Premiere Pro, Indesign).</a:t>
+            </a:r>
+          </a:p>
+          <a:p>
+            <a:pPr algn="l" lvl="1">
+              <a:spcAft>
+                <a:spcPts val="100"/>
+              </a:spcAft>
+            </a:pPr>
+            <a:r>
+              <a:rPr sz="1200" b="1" i="0">
+                <a:solidFill>
+                  <a:srgbClr val="3AEDE5"/>
+                </a:solidFill>
+                <a:latin typeface="Alegreya Sans"/>
+              </a:rPr>
+              <a:t>•  </a:t>
+            </a:r>
+            <a:r>
+              <a:rPr sz="1200" b="0" i="0">
+                <a:solidFill>
+                  <a:srgbClr val="FFFFFF"/>
+                </a:solidFill>
+                <a:latin typeface="Alegreya Sans"/>
+              </a:rPr>
+              <a:t>Ran a Mailchimp emailing campaign: +100% visitor attendance and +60% registrations vs prior edition (1,300 vs 800).</a:t>
+            </a:r>
+          </a:p>
+          <a:p>
+            <a:pPr algn="l">
+              <a:spcAft>
+                <a:spcPts val="100"/>
+              </a:spcAft>
+            </a:pPr>
+            <a:r>
+              <a:rPr sz="1200" b="1" i="0">
+                <a:solidFill>
+                  <a:srgbClr val="3AEDE5"/>
+                </a:solidFill>
+                <a:latin typeface="Alegreya Sans"/>
+              </a:rPr>
+              <a:t>▸ </a:t>
+            </a:r>
+            <a:r>
+              <a:rPr sz="1200" b="1" i="0">
+                <a:solidFill>
+                  <a:srgbClr val="FFFFFF"/>
+                </a:solidFill>
+                <a:latin typeface="Alegreya Sans"/>
+              </a:rPr>
+              <a:t>IPM (Belgian press group)</a:t>
+            </a:r>
+            <a:r>
+              <a:rPr sz="1200" b="0" i="0">
+                <a:solidFill>
+                  <a:srgbClr val="FFFFFF"/>
+                </a:solidFill>
+                <a:latin typeface="Alegreya Sans"/>
+              </a:rPr>
+              <a:t> — Customer Relations Manager</a:t>
+            </a:r>
+            <a:r>
+              <a:rPr sz="1200" b="0" i="1">
+                <a:solidFill>
+                  <a:srgbClr val="3AEDE5"/>
+                </a:solidFill>
+                <a:latin typeface="Alegreya Sans"/>
+              </a:rPr>
+              <a:t>  (Sept. 2023 — Aug. 2024)</a:t>
+            </a:r>
+          </a:p>
+          <a:p>
+            <a:pPr algn="l" lvl="1">
+              <a:spcAft>
+                <a:spcPts val="100"/>
+              </a:spcAft>
+            </a:pPr>
+            <a:r>
+              <a:rPr sz="1200" b="1" i="0">
+                <a:solidFill>
+                  <a:srgbClr val="3AEDE5"/>
+                </a:solidFill>
+                <a:latin typeface="Alegreya Sans"/>
+              </a:rPr>
+              <a:t>•  </a:t>
+            </a:r>
+            <a:r>
+              <a:rPr sz="1200" b="0" i="0">
+                <a:solidFill>
+                  <a:srgbClr val="FFFFFF"/>
+                </a:solidFill>
+                <a:latin typeface="Alegreya Sans"/>
+              </a:rPr>
+              <a:t>Contributed to the optimisation of CRM tools and processes (reporting, dashboards).</a:t>
+            </a:r>
+          </a:p>
+          <a:p>
+            <a:pPr algn="l" lvl="1">
+              <a:spcAft>
+                <a:spcPts val="100"/>
+              </a:spcAft>
+            </a:pPr>
+            <a:r>
+              <a:rPr sz="1200" b="1" i="0">
+                <a:solidFill>
+                  <a:srgbClr val="3AEDE5"/>
+                </a:solidFill>
+                <a:latin typeface="Alegreya Sans"/>
+              </a:rPr>
+              <a:t>•  </a:t>
+            </a:r>
+            <a:r>
+              <a:rPr sz="1200" b="0" i="0">
+                <a:solidFill>
+                  <a:srgbClr val="FFFFFF"/>
+                </a:solidFill>
+                <a:latin typeface="Alegreya Sans"/>
+              </a:rPr>
+              <a:t>Handled and followed up on Front-Office and Back-Office client requests (analysis, updates, resolution).</a:t>
+            </a:r>
+          </a:p>
+          <a:p>
+            <a:pPr algn="l">
+              <a:spcAft>
+                <a:spcPts val="100"/>
+              </a:spcAft>
+            </a:pPr>
+            <a:r>
+              <a:rPr sz="1200" b="1" i="0">
+                <a:solidFill>
+                  <a:srgbClr val="3AEDE5"/>
+                </a:solidFill>
+                <a:latin typeface="Alegreya Sans"/>
+              </a:rPr>
+              <a:t>▸ </a:t>
+            </a:r>
+            <a:r>
+              <a:rPr sz="1200" b="1" i="0">
+                <a:solidFill>
+                  <a:srgbClr val="FFFFFF"/>
+                </a:solidFill>
+                <a:latin typeface="Alegreya Sans"/>
+              </a:rPr>
+              <a:t>KOMNOW (digital marketing agency)</a:t>
+            </a:r>
+            <a:r>
+              <a:rPr sz="1200" b="0" i="0">
+                <a:solidFill>
+                  <a:srgbClr val="FFFFFF"/>
+                </a:solidFill>
+                <a:latin typeface="Alegreya Sans"/>
+              </a:rPr>
+              <a:t> — Sales / Marketing Assistant</a:t>
+            </a:r>
+            <a:r>
+              <a:rPr sz="1200" b="0" i="1">
+                <a:solidFill>
+                  <a:srgbClr val="3AEDE5"/>
+                </a:solidFill>
+                <a:latin typeface="Alegreya Sans"/>
+              </a:rPr>
+              <a:t>  (Jan. 2020 — Aug. 2023)</a:t>
+            </a:r>
+          </a:p>
+          <a:p>
+            <a:pPr algn="l" lvl="1">
+              <a:spcAft>
+                <a:spcPts val="100"/>
+              </a:spcAft>
+            </a:pPr>
+            <a:r>
+              <a:rPr sz="1200" b="1" i="0">
+                <a:solidFill>
+                  <a:srgbClr val="3AEDE5"/>
+                </a:solidFill>
+                <a:latin typeface="Alegreya Sans"/>
+              </a:rPr>
+              <a:t>•  </a:t>
+            </a:r>
+            <a:r>
+              <a:rPr sz="1200" b="0" i="0">
+                <a:solidFill>
+                  <a:srgbClr val="FFFFFF"/>
+                </a:solidFill>
+                <a:latin typeface="Alegreya Sans"/>
+              </a:rPr>
+              <a:t>Prospecting and market analysis; sales proposals; client follow-up and loyalty.</a:t>
+            </a:r>
+          </a:p>
+          <a:p>
+            <a:pPr algn="l" lvl="1">
+              <a:spcAft>
+                <a:spcPts val="100"/>
+              </a:spcAft>
+            </a:pPr>
+            <a:r>
+              <a:rPr sz="1200" b="1" i="0">
+                <a:solidFill>
+                  <a:srgbClr val="3AEDE5"/>
+                </a:solidFill>
+                <a:latin typeface="Alegreya Sans"/>
+              </a:rPr>
+              <a:t>•  </a:t>
+            </a:r>
+            <a:r>
+              <a:rPr sz="1200" b="0" i="0">
+                <a:solidFill>
+                  <a:srgbClr val="FFFFFF"/>
+                </a:solidFill>
+                <a:latin typeface="Alegreya Sans"/>
+              </a:rPr>
+              <a:t>Created communication materials (flyers, visuals, newsletters, digital content); managed social media.</a:t>
+            </a:r>
+          </a:p>
+        </p:txBody>
+      </p:sp>
+      <p:sp>
+        <p:nvSpPr>
+          <p:cNvPr id="9" name="Rectangle 8"/>
           <p:cNvSpPr/>
           <p:nvPr/>
         </p:nvSpPr>
@@ -4330,911 +5213,6 @@
           <a:lstStyle/>
           <a:p>
             <a:pPr algn="ctr"/>
-          </a:p>
-        </p:txBody>
-      </p:sp>
-      <p:pic>
-        <p:nvPicPr>
-          <p:cNvPr id="5" name="Picture 4" descr="inside_circle_logo.png"/>
-          <p:cNvPicPr>
-            <a:picLocks noChangeAspect="1"/>
-          </p:cNvPicPr>
-          <p:nvPr/>
-        </p:nvPicPr>
-        <p:blipFill>
-          <a:blip r:embed="rId2"/>
-          <a:stretch>
-            <a:fillRect/>
-          </a:stretch>
-        </p:blipFill>
-        <p:spPr>
-          <a:xfrm>
-            <a:off x="10660000" y="130000"/>
-            <a:ext cx="1302000" cy="420000"/>
-          </a:xfrm>
-          <a:prstGeom prst="rect">
-            <a:avLst/>
-          </a:prstGeom>
-        </p:spPr>
-      </p:pic>
-      <p:sp>
-        <p:nvSpPr>
-          <p:cNvPr id="6" name="TextBox 5"/>
-          <p:cNvSpPr txBox="1"/>
-          <p:nvPr/>
-        </p:nvSpPr>
-        <p:spPr>
-          <a:xfrm>
-            <a:off x="228600" y="260000"/>
-            <a:ext cx="3842800" cy="800000"/>
-          </a:xfrm>
-          <a:prstGeom prst="rect">
-            <a:avLst/>
-          </a:prstGeom>
-          <a:noFill/>
-        </p:spPr>
-        <p:txBody>
-          <a:bodyPr wrap="square" lIns="0" rIns="0" tIns="0" bIns="0">
-            <a:spAutoFit/>
-          </a:bodyPr>
-          <a:lstStyle/>
-          <a:p>
-            <a:pPr algn="l"/>
-            <a:r>
-              <a:rPr sz="4800" b="1" i="0">
-                <a:solidFill>
-                  <a:srgbClr val="3AEDE5"/>
-                </a:solidFill>
-                <a:latin typeface="Alegreya Sans"/>
-              </a:rPr>
-              <a:t>C.H.</a:t>
-            </a:r>
-          </a:p>
-        </p:txBody>
-      </p:sp>
-      <p:sp>
-        <p:nvSpPr>
-          <p:cNvPr id="7" name="TextBox 6"/>
-          <p:cNvSpPr txBox="1"/>
-          <p:nvPr/>
-        </p:nvSpPr>
-        <p:spPr>
-          <a:xfrm>
-            <a:off x="4528600" y="300000"/>
-            <a:ext cx="5963400" cy="800000"/>
-          </a:xfrm>
-          <a:prstGeom prst="rect">
-            <a:avLst/>
-          </a:prstGeom>
-          <a:noFill/>
-        </p:spPr>
-        <p:txBody>
-          <a:bodyPr wrap="square" lIns="0" rIns="0" tIns="0" bIns="0">
-            <a:spAutoFit/>
-          </a:bodyPr>
-          <a:lstStyle/>
-          <a:p>
-            <a:r>
-              <a:rPr sz="2400" b="1" i="0">
-                <a:solidFill>
-                  <a:srgbClr val="FFFFFF"/>
-                </a:solidFill>
-                <a:latin typeface="Alegreya Sans"/>
-              </a:rPr>
-              <a:t>Content Creation &amp; Digital Marketing Officer</a:t>
-            </a:r>
-          </a:p>
-          <a:p>
-            <a:pPr>
-              <a:spcBef>
-                <a:spcPts val="200"/>
-              </a:spcBef>
-            </a:pPr>
-            <a:r>
-              <a:rPr sz="1500" b="0" i="1">
-                <a:solidFill>
-                  <a:srgbClr val="3AEDE5"/>
-                </a:solidFill>
-                <a:latin typeface="Alegreya Sans"/>
-              </a:rPr>
-              <a:t>Digital Marketing — Content Creation (work-study)</a:t>
-            </a:r>
-          </a:p>
-        </p:txBody>
-      </p:sp>
-      <p:sp>
-        <p:nvSpPr>
-          <p:cNvPr id="8" name="TextBox 7"/>
-          <p:cNvSpPr txBox="1"/>
-          <p:nvPr/>
-        </p:nvSpPr>
-        <p:spPr>
-          <a:xfrm>
-            <a:off x="228600" y="1180000"/>
-            <a:ext cx="3842800" cy="5318000"/>
-          </a:xfrm>
-          <a:prstGeom prst="rect">
-            <a:avLst/>
-          </a:prstGeom>
-          <a:noFill/>
-        </p:spPr>
-        <p:txBody>
-          <a:bodyPr wrap="square" lIns="0" rIns="0" tIns="0" bIns="0">
-            <a:spAutoFit/>
-          </a:bodyPr>
-          <a:lstStyle/>
-          <a:p>
-            <a:pPr algn="l">
-              <a:spcAft>
-                <a:spcPts val="300"/>
-              </a:spcAft>
-            </a:pPr>
-            <a:r>
-              <a:rPr sz="1300" b="1" i="0">
-                <a:solidFill>
-                  <a:srgbClr val="3AEDE5"/>
-                </a:solidFill>
-                <a:latin typeface="Alegreya Sans"/>
-              </a:rPr>
-              <a:t>MAIN AREAS OF EXPERTISE</a:t>
-            </a:r>
-          </a:p>
-          <a:p>
-            <a:pPr algn="l">
-              <a:spcAft>
-                <a:spcPts val="100"/>
-              </a:spcAft>
-            </a:pPr>
-            <a:r>
-              <a:rPr sz="1200" b="1" i="0">
-                <a:solidFill>
-                  <a:srgbClr val="3AEDE5"/>
-                </a:solidFill>
-                <a:latin typeface="Alegreya Sans"/>
-              </a:rPr>
-              <a:t>•  </a:t>
-            </a:r>
-            <a:r>
-              <a:rPr sz="1200" b="0" i="0">
-                <a:solidFill>
-                  <a:srgbClr val="FFFFFF"/>
-                </a:solidFill>
-                <a:latin typeface="Alegreya Sans"/>
-              </a:rPr>
-              <a:t>Content creation (social &amp; web)</a:t>
-            </a:r>
-          </a:p>
-          <a:p>
-            <a:pPr algn="l">
-              <a:spcAft>
-                <a:spcPts val="100"/>
-              </a:spcAft>
-            </a:pPr>
-            <a:r>
-              <a:rPr sz="1200" b="1" i="0">
-                <a:solidFill>
-                  <a:srgbClr val="3AEDE5"/>
-                </a:solidFill>
-                <a:latin typeface="Alegreya Sans"/>
-              </a:rPr>
-              <a:t>•  </a:t>
-            </a:r>
-            <a:r>
-              <a:rPr sz="1200" b="0" i="0">
-                <a:solidFill>
-                  <a:srgbClr val="FFFFFF"/>
-                </a:solidFill>
-                <a:latin typeface="Alegreya Sans"/>
-              </a:rPr>
-              <a:t>Event marketing</a:t>
-            </a:r>
-          </a:p>
-          <a:p>
-            <a:pPr algn="l">
-              <a:spcAft>
-                <a:spcPts val="100"/>
-              </a:spcAft>
-            </a:pPr>
-            <a:r>
-              <a:rPr sz="1200" b="1" i="0">
-                <a:solidFill>
-                  <a:srgbClr val="3AEDE5"/>
-                </a:solidFill>
-                <a:latin typeface="Alegreya Sans"/>
-              </a:rPr>
-              <a:t>•  </a:t>
-            </a:r>
-            <a:r>
-              <a:rPr sz="1200" b="0" i="0">
-                <a:solidFill>
-                  <a:srgbClr val="FFFFFF"/>
-                </a:solidFill>
-                <a:latin typeface="Alegreya Sans"/>
-              </a:rPr>
-              <a:t>Emailing &amp; campaigns (Mailchimp)</a:t>
-            </a:r>
-          </a:p>
-          <a:p>
-            <a:pPr algn="l">
-              <a:spcAft>
-                <a:spcPts val="100"/>
-              </a:spcAft>
-            </a:pPr>
-            <a:r>
-              <a:rPr sz="1200" b="1" i="0">
-                <a:solidFill>
-                  <a:srgbClr val="3AEDE5"/>
-                </a:solidFill>
-                <a:latin typeface="Alegreya Sans"/>
-              </a:rPr>
-              <a:t>•  </a:t>
-            </a:r>
-            <a:r>
-              <a:rPr sz="1200" b="0" i="0">
-                <a:solidFill>
-                  <a:srgbClr val="FFFFFF"/>
-                </a:solidFill>
-                <a:latin typeface="Alegreya Sans"/>
-              </a:rPr>
-              <a:t>CRM &amp; client relations</a:t>
-            </a:r>
-          </a:p>
-          <a:p>
-            <a:pPr algn="l">
-              <a:spcAft>
-                <a:spcPts val="100"/>
-              </a:spcAft>
-            </a:pPr>
-            <a:r>
-              <a:rPr sz="1200" b="1" i="0">
-                <a:solidFill>
-                  <a:srgbClr val="3AEDE5"/>
-                </a:solidFill>
-                <a:latin typeface="Alegreya Sans"/>
-              </a:rPr>
-              <a:t>•  </a:t>
-            </a:r>
-            <a:r>
-              <a:rPr sz="1200" b="0" i="0">
-                <a:solidFill>
-                  <a:srgbClr val="FFFFFF"/>
-                </a:solidFill>
-                <a:latin typeface="Alegreya Sans"/>
-              </a:rPr>
-              <a:t>Reporting (GA, Meta, Excel)</a:t>
-            </a:r>
-          </a:p>
-          <a:p>
-            <a:pPr algn="l">
-              <a:spcBef>
-                <a:spcPts val="600"/>
-              </a:spcBef>
-              <a:spcAft>
-                <a:spcPts val="300"/>
-              </a:spcAft>
-            </a:pPr>
-            <a:r>
-              <a:rPr sz="1300" b="1" i="0">
-                <a:solidFill>
-                  <a:srgbClr val="3AEDE5"/>
-                </a:solidFill>
-                <a:latin typeface="Alegreya Sans"/>
-              </a:rPr>
-              <a:t>LANGUAGES</a:t>
-            </a:r>
-          </a:p>
-          <a:p>
-            <a:pPr algn="l">
-              <a:spcAft>
-                <a:spcPts val="100"/>
-              </a:spcAft>
-            </a:pPr>
-            <a:r>
-              <a:rPr sz="1200" b="1" i="0">
-                <a:solidFill>
-                  <a:srgbClr val="3AEDE5"/>
-                </a:solidFill>
-                <a:latin typeface="Alegreya Sans"/>
-              </a:rPr>
-              <a:t>•  </a:t>
-            </a:r>
-            <a:r>
-              <a:rPr sz="1200" b="0" i="0">
-                <a:solidFill>
-                  <a:srgbClr val="FFFFFF"/>
-                </a:solidFill>
-                <a:latin typeface="Alegreya Sans"/>
-              </a:rPr>
-              <a:t>French — Fluent</a:t>
-            </a:r>
-          </a:p>
-          <a:p>
-            <a:pPr algn="l">
-              <a:spcAft>
-                <a:spcPts val="100"/>
-              </a:spcAft>
-            </a:pPr>
-            <a:r>
-              <a:rPr sz="1200" b="1" i="0">
-                <a:solidFill>
-                  <a:srgbClr val="3AEDE5"/>
-                </a:solidFill>
-                <a:latin typeface="Alegreya Sans"/>
-              </a:rPr>
-              <a:t>•  </a:t>
-            </a:r>
-            <a:r>
-              <a:rPr sz="1200" b="0" i="0">
-                <a:solidFill>
-                  <a:srgbClr val="FFFFFF"/>
-                </a:solidFill>
-                <a:latin typeface="Alegreya Sans"/>
-              </a:rPr>
-              <a:t>English — Fluent</a:t>
-            </a:r>
-          </a:p>
-          <a:p>
-            <a:pPr algn="l">
-              <a:spcAft>
-                <a:spcPts val="100"/>
-              </a:spcAft>
-            </a:pPr>
-            <a:r>
-              <a:rPr sz="1200" b="1" i="0">
-                <a:solidFill>
-                  <a:srgbClr val="3AEDE5"/>
-                </a:solidFill>
-                <a:latin typeface="Alegreya Sans"/>
-              </a:rPr>
-              <a:t>•  </a:t>
-            </a:r>
-            <a:r>
-              <a:rPr sz="1200" b="0" i="0">
-                <a:solidFill>
-                  <a:srgbClr val="FFFFFF"/>
-                </a:solidFill>
-                <a:latin typeface="Alegreya Sans"/>
-              </a:rPr>
-              <a:t>Arabic — Fluent</a:t>
-            </a:r>
-          </a:p>
-          <a:p>
-            <a:pPr algn="l">
-              <a:spcBef>
-                <a:spcPts val="600"/>
-              </a:spcBef>
-              <a:spcAft>
-                <a:spcPts val="300"/>
-              </a:spcAft>
-            </a:pPr>
-            <a:r>
-              <a:rPr sz="1300" b="1" i="0">
-                <a:solidFill>
-                  <a:srgbClr val="3AEDE5"/>
-                </a:solidFill>
-                <a:latin typeface="Alegreya Sans"/>
-              </a:rPr>
-              <a:t>EDUCATION &amp; CERTIFICATIONS</a:t>
-            </a:r>
-          </a:p>
-          <a:p>
-            <a:pPr algn="l">
-              <a:spcAft>
-                <a:spcPts val="100"/>
-              </a:spcAft>
-            </a:pPr>
-            <a:r>
-              <a:rPr sz="1200" b="1" i="0">
-                <a:solidFill>
-                  <a:srgbClr val="3AEDE5"/>
-                </a:solidFill>
-                <a:latin typeface="Alegreya Sans"/>
-              </a:rPr>
-              <a:t>2024 — Present  </a:t>
-            </a:r>
-            <a:r>
-              <a:rPr sz="1200" b="1" i="0">
-                <a:solidFill>
-                  <a:srgbClr val="FFFFFF"/>
-                </a:solidFill>
-                <a:latin typeface="Alegreya Sans"/>
-              </a:rPr>
-              <a:t>INSEEC Business School</a:t>
-            </a:r>
-          </a:p>
-          <a:p>
-            <a:pPr algn="l">
-              <a:spcAft>
-                <a:spcPts val="300"/>
-              </a:spcAft>
-            </a:pPr>
-            <a:r>
-              <a:rPr sz="1200" b="0" i="1">
-                <a:solidFill>
-                  <a:srgbClr val="CCD6E8"/>
-                </a:solidFill>
-                <a:latin typeface="Alegreya Sans"/>
-              </a:rPr>
-              <a:t>Bachelor Marketing &amp; Communication PM</a:t>
-            </a:r>
-          </a:p>
-          <a:p>
-            <a:pPr algn="l">
-              <a:spcAft>
-                <a:spcPts val="100"/>
-              </a:spcAft>
-            </a:pPr>
-            <a:r>
-              <a:rPr sz="1200" b="1" i="0">
-                <a:solidFill>
-                  <a:srgbClr val="3AEDE5"/>
-                </a:solidFill>
-                <a:latin typeface="Alegreya Sans"/>
-              </a:rPr>
-              <a:t>BSc 3  </a:t>
-            </a:r>
-            <a:r>
-              <a:rPr sz="1200" b="1" i="0">
-                <a:solidFill>
-                  <a:srgbClr val="FFFFFF"/>
-                </a:solidFill>
-                <a:latin typeface="Alegreya Sans"/>
-              </a:rPr>
-              <a:t>University of Sciences &amp; Technology</a:t>
-            </a:r>
-          </a:p>
-          <a:p>
-            <a:pPr algn="l">
-              <a:spcAft>
-                <a:spcPts val="300"/>
-              </a:spcAft>
-            </a:pPr>
-            <a:r>
-              <a:rPr sz="1200" b="0" i="1">
-                <a:solidFill>
-                  <a:srgbClr val="CCD6E8"/>
-                </a:solidFill>
-                <a:latin typeface="Alegreya Sans"/>
-              </a:rPr>
-              <a:t>Operations Research</a:t>
-            </a:r>
-          </a:p>
-          <a:p>
-            <a:pPr algn="l">
-              <a:spcBef>
-                <a:spcPts val="600"/>
-              </a:spcBef>
-              <a:spcAft>
-                <a:spcPts val="300"/>
-              </a:spcAft>
-            </a:pPr>
-            <a:r>
-              <a:rPr sz="1300" b="1" i="0">
-                <a:solidFill>
-                  <a:srgbClr val="3AEDE5"/>
-                </a:solidFill>
-                <a:latin typeface="Alegreya Sans"/>
-              </a:rPr>
-              <a:t>INTERESTS</a:t>
-            </a:r>
-          </a:p>
-          <a:p>
-            <a:pPr algn="l">
-              <a:spcAft>
-                <a:spcPts val="100"/>
-              </a:spcAft>
-            </a:pPr>
-            <a:r>
-              <a:rPr sz="1200" b="1" i="0">
-                <a:solidFill>
-                  <a:srgbClr val="3AEDE5"/>
-                </a:solidFill>
-                <a:latin typeface="Alegreya Sans"/>
-              </a:rPr>
-              <a:t>•  </a:t>
-            </a:r>
-            <a:r>
-              <a:rPr sz="1200" b="0" i="0">
-                <a:solidFill>
-                  <a:srgbClr val="FFFFFF"/>
-                </a:solidFill>
-                <a:latin typeface="Alegreya Sans"/>
-              </a:rPr>
-              <a:t>Cinema (Wong Kar-Wai)</a:t>
-            </a:r>
-          </a:p>
-          <a:p>
-            <a:pPr algn="l">
-              <a:spcAft>
-                <a:spcPts val="100"/>
-              </a:spcAft>
-            </a:pPr>
-            <a:r>
-              <a:rPr sz="1200" b="1" i="0">
-                <a:solidFill>
-                  <a:srgbClr val="3AEDE5"/>
-                </a:solidFill>
-                <a:latin typeface="Alegreya Sans"/>
-              </a:rPr>
-              <a:t>•  </a:t>
-            </a:r>
-            <a:r>
-              <a:rPr sz="1200" b="0" i="0">
-                <a:solidFill>
-                  <a:srgbClr val="FFFFFF"/>
-                </a:solidFill>
-                <a:latin typeface="Alegreya Sans"/>
-              </a:rPr>
-              <a:t>Painting &amp; sketching</a:t>
-            </a:r>
-          </a:p>
-          <a:p>
-            <a:pPr algn="l">
-              <a:spcAft>
-                <a:spcPts val="100"/>
-              </a:spcAft>
-            </a:pPr>
-            <a:r>
-              <a:rPr sz="1200" b="1" i="0">
-                <a:solidFill>
-                  <a:srgbClr val="3AEDE5"/>
-                </a:solidFill>
-                <a:latin typeface="Alegreya Sans"/>
-              </a:rPr>
-              <a:t>•  </a:t>
-            </a:r>
-            <a:r>
-              <a:rPr sz="1200" b="0" i="0">
-                <a:solidFill>
-                  <a:srgbClr val="FFFFFF"/>
-                </a:solidFill>
-                <a:latin typeface="Alegreya Sans"/>
-              </a:rPr>
-              <a:t>Fashion</a:t>
-            </a:r>
-          </a:p>
-          <a:p>
-            <a:pPr algn="l">
-              <a:spcAft>
-                <a:spcPts val="100"/>
-              </a:spcAft>
-            </a:pPr>
-            <a:r>
-              <a:rPr sz="1200" b="1" i="0">
-                <a:solidFill>
-                  <a:srgbClr val="3AEDE5"/>
-                </a:solidFill>
-                <a:latin typeface="Alegreya Sans"/>
-              </a:rPr>
-              <a:t>•  </a:t>
-            </a:r>
-            <a:r>
-              <a:rPr sz="1200" b="0" i="0">
-                <a:solidFill>
-                  <a:srgbClr val="FFFFFF"/>
-                </a:solidFill>
-                <a:latin typeface="Alegreya Sans"/>
-              </a:rPr>
-              <a:t>Swimming (regional competition)</a:t>
-            </a:r>
-          </a:p>
-        </p:txBody>
-      </p:sp>
-      <p:sp>
-        <p:nvSpPr>
-          <p:cNvPr id="9" name="TextBox 8"/>
-          <p:cNvSpPr txBox="1"/>
-          <p:nvPr/>
-        </p:nvSpPr>
-        <p:spPr>
-          <a:xfrm>
-            <a:off x="4528600" y="1180000"/>
-            <a:ext cx="7434800" cy="5318000"/>
-          </a:xfrm>
-          <a:prstGeom prst="rect">
-            <a:avLst/>
-          </a:prstGeom>
-          <a:noFill/>
-        </p:spPr>
-        <p:txBody>
-          <a:bodyPr wrap="square" lIns="0" rIns="0" tIns="0" bIns="0">
-            <a:spAutoFit/>
-          </a:bodyPr>
-          <a:lstStyle/>
-          <a:p>
-            <a:pPr algn="l">
-              <a:spcAft>
-                <a:spcPts val="300"/>
-              </a:spcAft>
-            </a:pPr>
-            <a:r>
-              <a:rPr sz="1300" b="1" i="0">
-                <a:solidFill>
-                  <a:srgbClr val="3AEDE5"/>
-                </a:solidFill>
-                <a:latin typeface="Alegreya Sans"/>
-              </a:rPr>
-              <a:t>PROFESSIONAL EXPERIENCE</a:t>
-            </a:r>
-          </a:p>
-          <a:p>
-            <a:pPr algn="l">
-              <a:spcAft>
-                <a:spcPts val="100"/>
-              </a:spcAft>
-            </a:pPr>
-            <a:r>
-              <a:rPr sz="1200" b="1" i="0">
-                <a:solidFill>
-                  <a:srgbClr val="3AEDE5"/>
-                </a:solidFill>
-                <a:latin typeface="Alegreya Sans"/>
-              </a:rPr>
-              <a:t>▸ </a:t>
-            </a:r>
-            <a:r>
-              <a:rPr sz="1200" b="1" i="0">
-                <a:solidFill>
-                  <a:srgbClr val="FFFFFF"/>
-                </a:solidFill>
-                <a:latin typeface="Alegreya Sans"/>
-              </a:rPr>
-              <a:t>Galerie Joseph (network of 30 venues, Le Marais)</a:t>
-            </a:r>
-            <a:r>
-              <a:rPr sz="1200" b="0" i="0">
-                <a:solidFill>
-                  <a:srgbClr val="FFFFFF"/>
-                </a:solidFill>
-                <a:latin typeface="Alegreya Sans"/>
-              </a:rPr>
-              <a:t> — Communication / Event Project Assistant</a:t>
-            </a:r>
-            <a:r>
-              <a:rPr sz="1200" b="0" i="1">
-                <a:solidFill>
-                  <a:srgbClr val="3AEDE5"/>
-                </a:solidFill>
-                <a:latin typeface="Alegreya Sans"/>
-              </a:rPr>
-              <a:t>  (June — Dec. 2025)</a:t>
-            </a:r>
-          </a:p>
-          <a:p>
-            <a:pPr algn="l" lvl="1">
-              <a:spcAft>
-                <a:spcPts val="100"/>
-              </a:spcAft>
-            </a:pPr>
-            <a:r>
-              <a:rPr sz="1200" b="1" i="0">
-                <a:solidFill>
-                  <a:srgbClr val="3AEDE5"/>
-                </a:solidFill>
-                <a:latin typeface="Alegreya Sans"/>
-              </a:rPr>
-              <a:t>•  </a:t>
-            </a:r>
-            <a:r>
-              <a:rPr sz="1200" b="0" i="0">
-                <a:solidFill>
-                  <a:srgbClr val="FFFFFF"/>
-                </a:solidFill>
-                <a:latin typeface="Alegreya Sans"/>
-              </a:rPr>
-              <a:t>Created visual content and publications for social media, website and newsletters (Photoshop, Canva, Premiere Pro, Indesign).</a:t>
-            </a:r>
-          </a:p>
-          <a:p>
-            <a:pPr algn="l" lvl="1">
-              <a:spcAft>
-                <a:spcPts val="100"/>
-              </a:spcAft>
-            </a:pPr>
-            <a:r>
-              <a:rPr sz="1200" b="1" i="0">
-                <a:solidFill>
-                  <a:srgbClr val="3AEDE5"/>
-                </a:solidFill>
-                <a:latin typeface="Alegreya Sans"/>
-              </a:rPr>
-              <a:t>•  </a:t>
-            </a:r>
-            <a:r>
-              <a:rPr sz="1200" b="0" i="0">
-                <a:solidFill>
-                  <a:srgbClr val="FFFFFF"/>
-                </a:solidFill>
-                <a:latin typeface="Alegreya Sans"/>
-              </a:rPr>
-              <a:t>Ran a Mailchimp emailing campaign: +100% visitor attendance and +60% registrations vs prior edition (1,300 vs 800).</a:t>
-            </a:r>
-          </a:p>
-          <a:p>
-            <a:pPr algn="l">
-              <a:spcAft>
-                <a:spcPts val="100"/>
-              </a:spcAft>
-            </a:pPr>
-            <a:r>
-              <a:rPr sz="1200" b="1" i="0">
-                <a:solidFill>
-                  <a:srgbClr val="3AEDE5"/>
-                </a:solidFill>
-                <a:latin typeface="Alegreya Sans"/>
-              </a:rPr>
-              <a:t>▸ </a:t>
-            </a:r>
-            <a:r>
-              <a:rPr sz="1200" b="1" i="0">
-                <a:solidFill>
-                  <a:srgbClr val="FFFFFF"/>
-                </a:solidFill>
-                <a:latin typeface="Alegreya Sans"/>
-              </a:rPr>
-              <a:t>IPM (Belgian press group)</a:t>
-            </a:r>
-            <a:r>
-              <a:rPr sz="1200" b="0" i="0">
-                <a:solidFill>
-                  <a:srgbClr val="FFFFFF"/>
-                </a:solidFill>
-                <a:latin typeface="Alegreya Sans"/>
-              </a:rPr>
-              <a:t> — Customer Relations Manager</a:t>
-            </a:r>
-            <a:r>
-              <a:rPr sz="1200" b="0" i="1">
-                <a:solidFill>
-                  <a:srgbClr val="3AEDE5"/>
-                </a:solidFill>
-                <a:latin typeface="Alegreya Sans"/>
-              </a:rPr>
-              <a:t>  (Sept. 2023 — Aug. 2024)</a:t>
-            </a:r>
-          </a:p>
-          <a:p>
-            <a:pPr algn="l" lvl="1">
-              <a:spcAft>
-                <a:spcPts val="100"/>
-              </a:spcAft>
-            </a:pPr>
-            <a:r>
-              <a:rPr sz="1200" b="1" i="0">
-                <a:solidFill>
-                  <a:srgbClr val="3AEDE5"/>
-                </a:solidFill>
-                <a:latin typeface="Alegreya Sans"/>
-              </a:rPr>
-              <a:t>•  </a:t>
-            </a:r>
-            <a:r>
-              <a:rPr sz="1200" b="0" i="0">
-                <a:solidFill>
-                  <a:srgbClr val="FFFFFF"/>
-                </a:solidFill>
-                <a:latin typeface="Alegreya Sans"/>
-              </a:rPr>
-              <a:t>Contributed to the optimisation of CRM tools and processes (reporting, dashboards).</a:t>
-            </a:r>
-          </a:p>
-          <a:p>
-            <a:pPr algn="l" lvl="1">
-              <a:spcAft>
-                <a:spcPts val="100"/>
-              </a:spcAft>
-            </a:pPr>
-            <a:r>
-              <a:rPr sz="1200" b="1" i="0">
-                <a:solidFill>
-                  <a:srgbClr val="3AEDE5"/>
-                </a:solidFill>
-                <a:latin typeface="Alegreya Sans"/>
-              </a:rPr>
-              <a:t>•  </a:t>
-            </a:r>
-            <a:r>
-              <a:rPr sz="1200" b="0" i="0">
-                <a:solidFill>
-                  <a:srgbClr val="FFFFFF"/>
-                </a:solidFill>
-                <a:latin typeface="Alegreya Sans"/>
-              </a:rPr>
-              <a:t>Handled and followed up on Front-Office and Back-Office client requests (analysis, updates, resolution).</a:t>
-            </a:r>
-          </a:p>
-          <a:p>
-            <a:pPr algn="l">
-              <a:spcAft>
-                <a:spcPts val="100"/>
-              </a:spcAft>
-            </a:pPr>
-            <a:r>
-              <a:rPr sz="1200" b="1" i="0">
-                <a:solidFill>
-                  <a:srgbClr val="3AEDE5"/>
-                </a:solidFill>
-                <a:latin typeface="Alegreya Sans"/>
-              </a:rPr>
-              <a:t>▸ </a:t>
-            </a:r>
-            <a:r>
-              <a:rPr sz="1200" b="1" i="0">
-                <a:solidFill>
-                  <a:srgbClr val="FFFFFF"/>
-                </a:solidFill>
-                <a:latin typeface="Alegreya Sans"/>
-              </a:rPr>
-              <a:t>KOMNOW (digital marketing agency)</a:t>
-            </a:r>
-            <a:r>
-              <a:rPr sz="1200" b="0" i="0">
-                <a:solidFill>
-                  <a:srgbClr val="FFFFFF"/>
-                </a:solidFill>
-                <a:latin typeface="Alegreya Sans"/>
-              </a:rPr>
-              <a:t> — Sales / Marketing Assistant</a:t>
-            </a:r>
-            <a:r>
-              <a:rPr sz="1200" b="0" i="1">
-                <a:solidFill>
-                  <a:srgbClr val="3AEDE5"/>
-                </a:solidFill>
-                <a:latin typeface="Alegreya Sans"/>
-              </a:rPr>
-              <a:t>  (Jan. 2020 — Aug. 2023)</a:t>
-            </a:r>
-          </a:p>
-          <a:p>
-            <a:pPr algn="l" lvl="1">
-              <a:spcAft>
-                <a:spcPts val="100"/>
-              </a:spcAft>
-            </a:pPr>
-            <a:r>
-              <a:rPr sz="1200" b="1" i="0">
-                <a:solidFill>
-                  <a:srgbClr val="3AEDE5"/>
-                </a:solidFill>
-                <a:latin typeface="Alegreya Sans"/>
-              </a:rPr>
-              <a:t>•  </a:t>
-            </a:r>
-            <a:r>
-              <a:rPr sz="1200" b="0" i="0">
-                <a:solidFill>
-                  <a:srgbClr val="FFFFFF"/>
-                </a:solidFill>
-                <a:latin typeface="Alegreya Sans"/>
-              </a:rPr>
-              <a:t>Prospecting and market analysis; sales proposals; client follow-up and loyalty.</a:t>
-            </a:r>
-          </a:p>
-          <a:p>
-            <a:pPr algn="l" lvl="1">
-              <a:spcAft>
-                <a:spcPts val="100"/>
-              </a:spcAft>
-            </a:pPr>
-            <a:r>
-              <a:rPr sz="1200" b="1" i="0">
-                <a:solidFill>
-                  <a:srgbClr val="3AEDE5"/>
-                </a:solidFill>
-                <a:latin typeface="Alegreya Sans"/>
-              </a:rPr>
-              <a:t>•  </a:t>
-            </a:r>
-            <a:r>
-              <a:rPr sz="1200" b="0" i="0">
-                <a:solidFill>
-                  <a:srgbClr val="FFFFFF"/>
-                </a:solidFill>
-                <a:latin typeface="Alegreya Sans"/>
-              </a:rPr>
-              <a:t>Created communication materials (flyers, visuals, newsletters, digital content); managed social media.</a:t>
-            </a:r>
           </a:p>
         </p:txBody>
       </p:sp>
